--- a/Documentation/Thesis_Defend.PPTX
+++ b/Documentation/Thesis_Defend.PPTX
@@ -10,32 +10,33 @@
     <p:sldId id="258" r:id="rId4"/>
     <p:sldId id="259" r:id="rId5"/>
     <p:sldId id="281" r:id="rId6"/>
-    <p:sldId id="286" r:id="rId7"/>
-    <p:sldId id="290" r:id="rId8"/>
-    <p:sldId id="283" r:id="rId9"/>
-    <p:sldId id="282" r:id="rId10"/>
-    <p:sldId id="261" r:id="rId11"/>
-    <p:sldId id="263" r:id="rId12"/>
-    <p:sldId id="279" r:id="rId13"/>
-    <p:sldId id="280" r:id="rId14"/>
-    <p:sldId id="278" r:id="rId15"/>
-    <p:sldId id="284" r:id="rId16"/>
-    <p:sldId id="289" r:id="rId17"/>
-    <p:sldId id="264" r:id="rId18"/>
-    <p:sldId id="275" r:id="rId19"/>
-    <p:sldId id="276" r:id="rId20"/>
-    <p:sldId id="265" r:id="rId21"/>
-    <p:sldId id="266" r:id="rId22"/>
-    <p:sldId id="267" r:id="rId23"/>
-    <p:sldId id="268" r:id="rId24"/>
-    <p:sldId id="269" r:id="rId25"/>
-    <p:sldId id="270" r:id="rId26"/>
-    <p:sldId id="271" r:id="rId27"/>
-    <p:sldId id="272" r:id="rId28"/>
-    <p:sldId id="273" r:id="rId29"/>
-    <p:sldId id="285" r:id="rId30"/>
-    <p:sldId id="287" r:id="rId31"/>
-    <p:sldId id="288" r:id="rId32"/>
+    <p:sldId id="291" r:id="rId7"/>
+    <p:sldId id="283" r:id="rId8"/>
+    <p:sldId id="286" r:id="rId9"/>
+    <p:sldId id="290" r:id="rId10"/>
+    <p:sldId id="282" r:id="rId11"/>
+    <p:sldId id="261" r:id="rId12"/>
+    <p:sldId id="263" r:id="rId13"/>
+    <p:sldId id="279" r:id="rId14"/>
+    <p:sldId id="280" r:id="rId15"/>
+    <p:sldId id="278" r:id="rId16"/>
+    <p:sldId id="284" r:id="rId17"/>
+    <p:sldId id="289" r:id="rId18"/>
+    <p:sldId id="264" r:id="rId19"/>
+    <p:sldId id="275" r:id="rId20"/>
+    <p:sldId id="276" r:id="rId21"/>
+    <p:sldId id="265" r:id="rId22"/>
+    <p:sldId id="266" r:id="rId23"/>
+    <p:sldId id="267" r:id="rId24"/>
+    <p:sldId id="268" r:id="rId25"/>
+    <p:sldId id="269" r:id="rId26"/>
+    <p:sldId id="270" r:id="rId27"/>
+    <p:sldId id="271" r:id="rId28"/>
+    <p:sldId id="272" r:id="rId29"/>
+    <p:sldId id="273" r:id="rId30"/>
+    <p:sldId id="285" r:id="rId31"/>
+    <p:sldId id="287" r:id="rId32"/>
+    <p:sldId id="288" r:id="rId33"/>
   </p:sldIdLst>
   <p:sldSz cx="12192000" cy="6858000"/>
   <p:notesSz cx="6858000" cy="9144000"/>
@@ -1010,42 +1011,6 @@
         </a:p>
       </dgm:t>
     </dgm:pt>
-    <dgm:pt modelId="{F4A3F6A9-A391-4EE3-8947-D1DE73CF96AE}">
-      <dgm:prSet/>
-      <dgm:spPr/>
-      <dgm:t>
-        <a:bodyPr/>
-        <a:lstStyle/>
-        <a:p>
-          <a:r>
-            <a:rPr lang="en-US" dirty="0"/>
-            <a:t>Objectives</a:t>
-          </a:r>
-        </a:p>
-      </dgm:t>
-    </dgm:pt>
-    <dgm:pt modelId="{F9766294-9D4F-4762-A7CF-BF4F959D9638}" type="parTrans" cxnId="{83D02270-DB78-4818-ADC0-305C43B332CC}">
-      <dgm:prSet/>
-      <dgm:spPr/>
-      <dgm:t>
-        <a:bodyPr/>
-        <a:lstStyle/>
-        <a:p>
-          <a:endParaRPr lang="en-US"/>
-        </a:p>
-      </dgm:t>
-    </dgm:pt>
-    <dgm:pt modelId="{521ADE6E-2925-4CE8-B233-B677107C26BE}" type="sibTrans" cxnId="{83D02270-DB78-4818-ADC0-305C43B332CC}">
-      <dgm:prSet/>
-      <dgm:spPr/>
-      <dgm:t>
-        <a:bodyPr/>
-        <a:lstStyle/>
-        <a:p>
-          <a:endParaRPr lang="en-US"/>
-        </a:p>
-      </dgm:t>
-    </dgm:pt>
     <dgm:pt modelId="{08078E85-3288-49D4-9BD1-7D6C45ED0920}">
       <dgm:prSet/>
       <dgm:spPr/>
@@ -1262,6 +1227,42 @@
         </a:p>
       </dgm:t>
     </dgm:pt>
+    <dgm:pt modelId="{7C1A1444-16FD-4228-8A13-24F7854DC7DA}">
+      <dgm:prSet/>
+      <dgm:spPr/>
+      <dgm:t>
+        <a:bodyPr/>
+        <a:lstStyle/>
+        <a:p>
+          <a:r>
+            <a:rPr lang="en-US" dirty="0"/>
+            <a:t>Objectives</a:t>
+          </a:r>
+        </a:p>
+      </dgm:t>
+    </dgm:pt>
+    <dgm:pt modelId="{3BCAE110-3A9B-4825-88F0-3675F2AC3AEC}" type="parTrans" cxnId="{2CE9FECF-31A1-4521-B4B0-23516FB6B729}">
+      <dgm:prSet/>
+      <dgm:spPr/>
+      <dgm:t>
+        <a:bodyPr/>
+        <a:lstStyle/>
+        <a:p>
+          <a:endParaRPr lang="en-US"/>
+        </a:p>
+      </dgm:t>
+    </dgm:pt>
+    <dgm:pt modelId="{D1415C7D-46D2-4404-9C65-5BB01F490124}" type="sibTrans" cxnId="{2CE9FECF-31A1-4521-B4B0-23516FB6B729}">
+      <dgm:prSet/>
+      <dgm:spPr/>
+      <dgm:t>
+        <a:bodyPr/>
+        <a:lstStyle/>
+        <a:p>
+          <a:endParaRPr lang="en-US"/>
+        </a:p>
+      </dgm:t>
+    </dgm:pt>
     <dgm:pt modelId="{648AEBD6-AC80-4A10-A710-57859C1BCCD5}" type="pres">
       <dgm:prSet presAssocID="{DAD1C9E6-FAD3-47C3-B8FB-04C764464C29}" presName="Name0" presStyleCnt="0">
         <dgm:presLayoutVars>
@@ -1306,12 +1307,29 @@
       <dgm:prSet presAssocID="{D3C95F2F-2B1B-4982-8A23-3472E3FEFD14}" presName="sp" presStyleCnt="0"/>
       <dgm:spPr/>
     </dgm:pt>
+    <dgm:pt modelId="{0765A09F-5826-4C45-AA9F-8EEDE92275AE}" type="pres">
+      <dgm:prSet presAssocID="{7C1A1444-16FD-4228-8A13-24F7854DC7DA}" presName="linNode" presStyleCnt="0"/>
+      <dgm:spPr/>
+    </dgm:pt>
+    <dgm:pt modelId="{D29DD54E-9758-43A1-BD48-9F6A5592C825}" type="pres">
+      <dgm:prSet presAssocID="{7C1A1444-16FD-4228-8A13-24F7854DC7DA}" presName="parentText" presStyleLbl="node1" presStyleIdx="2" presStyleCnt="9">
+        <dgm:presLayoutVars>
+          <dgm:chMax val="1"/>
+          <dgm:bulletEnabled val="1"/>
+        </dgm:presLayoutVars>
+      </dgm:prSet>
+      <dgm:spPr/>
+    </dgm:pt>
+    <dgm:pt modelId="{CD8589CD-EFC2-46A8-8BF9-68D24C4D6FA5}" type="pres">
+      <dgm:prSet presAssocID="{D1415C7D-46D2-4404-9C65-5BB01F490124}" presName="sp" presStyleCnt="0"/>
+      <dgm:spPr/>
+    </dgm:pt>
     <dgm:pt modelId="{2F0D98B7-D3A8-4955-9446-3C65ED446703}" type="pres">
       <dgm:prSet presAssocID="{D044E51A-9B4A-43FC-A95E-9FB28B890A6A}" presName="linNode" presStyleCnt="0"/>
       <dgm:spPr/>
     </dgm:pt>
     <dgm:pt modelId="{42FCB565-2F8B-4597-8865-4F997E6E3587}" type="pres">
-      <dgm:prSet presAssocID="{D044E51A-9B4A-43FC-A95E-9FB28B890A6A}" presName="parentText" presStyleLbl="node1" presStyleIdx="2" presStyleCnt="9">
+      <dgm:prSet presAssocID="{D044E51A-9B4A-43FC-A95E-9FB28B890A6A}" presName="parentText" presStyleLbl="node1" presStyleIdx="3" presStyleCnt="9">
         <dgm:presLayoutVars>
           <dgm:chMax val="1"/>
           <dgm:bulletEnabled val="1"/>
@@ -1321,23 +1339,6 @@
     </dgm:pt>
     <dgm:pt modelId="{E7417E10-4266-4E80-B50B-D46C985CDD8D}" type="pres">
       <dgm:prSet presAssocID="{194B84AC-1381-4AB6-8306-1CFADAF7634E}" presName="sp" presStyleCnt="0"/>
-      <dgm:spPr/>
-    </dgm:pt>
-    <dgm:pt modelId="{1B36FCB7-7F0F-42EC-8052-DE4203084CBE}" type="pres">
-      <dgm:prSet presAssocID="{F4A3F6A9-A391-4EE3-8947-D1DE73CF96AE}" presName="linNode" presStyleCnt="0"/>
-      <dgm:spPr/>
-    </dgm:pt>
-    <dgm:pt modelId="{E73F2A97-BCBE-44DE-A16F-62EC3E77DBCE}" type="pres">
-      <dgm:prSet presAssocID="{F4A3F6A9-A391-4EE3-8947-D1DE73CF96AE}" presName="parentText" presStyleLbl="node1" presStyleIdx="3" presStyleCnt="9">
-        <dgm:presLayoutVars>
-          <dgm:chMax val="1"/>
-          <dgm:bulletEnabled val="1"/>
-        </dgm:presLayoutVars>
-      </dgm:prSet>
-      <dgm:spPr/>
-    </dgm:pt>
-    <dgm:pt modelId="{F079B831-667E-4D3B-9BC2-8237821D7B27}" type="pres">
-      <dgm:prSet presAssocID="{521ADE6E-2925-4CE8-B233-B677107C26BE}" presName="sp" presStyleCnt="0"/>
       <dgm:spPr/>
     </dgm:pt>
     <dgm:pt modelId="{92521C04-8CF3-4253-ACF9-C561B80FFBC1}" type="pres">
@@ -1429,18 +1430,18 @@
     <dgm:cxn modelId="{B870222B-0E95-4FE6-9C20-4ED40C7D3A6A}" type="presOf" srcId="{DAD1C9E6-FAD3-47C3-B8FB-04C764464C29}" destId="{648AEBD6-AC80-4A10-A710-57859C1BCCD5}" srcOrd="0" destOrd="0" presId="urn:microsoft.com/office/officeart/2005/8/layout/vList5"/>
     <dgm:cxn modelId="{E38E422C-4F80-4BB0-BF27-657D7033C4CC}" type="presOf" srcId="{6644AF87-81EB-4ADE-A7A1-CDD3CD3E7D81}" destId="{14A9FA02-BF86-4705-B0EC-E727E4AF3F7C}" srcOrd="0" destOrd="0" presId="urn:microsoft.com/office/officeart/2005/8/layout/vList5"/>
     <dgm:cxn modelId="{1A913731-06BD-4C7B-9318-5AF4EA524583}" type="presOf" srcId="{3F70F1A0-9B42-4EFE-8FA4-C81FBFCED328}" destId="{59F362CD-5718-4BF2-83B5-F50E914A976D}" srcOrd="0" destOrd="0" presId="urn:microsoft.com/office/officeart/2005/8/layout/vList5"/>
-    <dgm:cxn modelId="{2EF51232-940C-44C4-B6DF-5DA1D25B8119}" srcId="{DAD1C9E6-FAD3-47C3-B8FB-04C764464C29}" destId="{D044E51A-9B4A-43FC-A95E-9FB28B890A6A}" srcOrd="2" destOrd="0" parTransId="{C7B7CA0B-A671-4E08-8BE5-2CF3C5A2523E}" sibTransId="{194B84AC-1381-4AB6-8306-1CFADAF7634E}"/>
+    <dgm:cxn modelId="{2EF51232-940C-44C4-B6DF-5DA1D25B8119}" srcId="{DAD1C9E6-FAD3-47C3-B8FB-04C764464C29}" destId="{D044E51A-9B4A-43FC-A95E-9FB28B890A6A}" srcOrd="3" destOrd="0" parTransId="{C7B7CA0B-A671-4E08-8BE5-2CF3C5A2523E}" sibTransId="{194B84AC-1381-4AB6-8306-1CFADAF7634E}"/>
     <dgm:cxn modelId="{C96D5C4B-4754-457A-BF22-6B8C8995C3C0}" type="presOf" srcId="{08078E85-3288-49D4-9BD1-7D6C45ED0920}" destId="{75C6D2BB-6ED7-405C-B450-5E4D169A4AAB}" srcOrd="0" destOrd="0" presId="urn:microsoft.com/office/officeart/2005/8/layout/vList5"/>
     <dgm:cxn modelId="{C5C9E54E-EB5D-44CA-A35F-31DD18879DF2}" type="presOf" srcId="{D044E51A-9B4A-43FC-A95E-9FB28B890A6A}" destId="{42FCB565-2F8B-4597-8865-4F997E6E3587}" srcOrd="0" destOrd="0" presId="urn:microsoft.com/office/officeart/2005/8/layout/vList5"/>
-    <dgm:cxn modelId="{83D02270-DB78-4818-ADC0-305C43B332CC}" srcId="{DAD1C9E6-FAD3-47C3-B8FB-04C764464C29}" destId="{F4A3F6A9-A391-4EE3-8947-D1DE73CF96AE}" srcOrd="3" destOrd="0" parTransId="{F9766294-9D4F-4762-A7CF-BF4F959D9638}" sibTransId="{521ADE6E-2925-4CE8-B233-B677107C26BE}"/>
     <dgm:cxn modelId="{88F5997C-28A9-4F27-BDC8-D3649C3B4F4D}" srcId="{DAD1C9E6-FAD3-47C3-B8FB-04C764464C29}" destId="{648755B1-6475-41E2-935A-81A237D57064}" srcOrd="6" destOrd="0" parTransId="{19D625DA-B837-4248-BD24-8FF04DF0458A}" sibTransId="{1101A902-A9BC-48CB-9A4C-F70D02DECEF6}"/>
     <dgm:cxn modelId="{4273C197-5E21-4E60-B128-58183F2D30FF}" srcId="{DAD1C9E6-FAD3-47C3-B8FB-04C764464C29}" destId="{B4E11199-5A33-42DC-9939-903A99FD9F5E}" srcOrd="8" destOrd="0" parTransId="{D02B4790-FC66-4523-8E55-A632FBE177DC}" sibTransId="{813AA932-C177-4E59-B659-F64B861CBC4A}"/>
+    <dgm:cxn modelId="{83D31AA0-FD8E-4BA7-A822-F91717C9E22A}" type="presOf" srcId="{7C1A1444-16FD-4228-8A13-24F7854DC7DA}" destId="{D29DD54E-9758-43A1-BD48-9F6A5592C825}" srcOrd="0" destOrd="0" presId="urn:microsoft.com/office/officeart/2005/8/layout/vList5"/>
     <dgm:cxn modelId="{F6BAC6AB-0196-48E1-86C8-8745C833CF5C}" type="presOf" srcId="{88CA96D5-0ECD-450A-B2E5-3C85AB228455}" destId="{D298E97B-1053-435B-B844-E182EA94393F}" srcOrd="0" destOrd="0" presId="urn:microsoft.com/office/officeart/2005/8/layout/vList5"/>
     <dgm:cxn modelId="{69DA0CAC-004F-41C5-BF24-BBA415E55E5C}" srcId="{DAD1C9E6-FAD3-47C3-B8FB-04C764464C29}" destId="{08078E85-3288-49D4-9BD1-7D6C45ED0920}" srcOrd="4" destOrd="0" parTransId="{E0D8E988-FDC2-4570-988E-9F552F18BCB0}" sibTransId="{CAD28AFF-DED6-4033-BF34-63249E47D5DD}"/>
     <dgm:cxn modelId="{0536E1B1-DF47-4F81-85E7-F2D68367909F}" srcId="{DAD1C9E6-FAD3-47C3-B8FB-04C764464C29}" destId="{6644AF87-81EB-4ADE-A7A1-CDD3CD3E7D81}" srcOrd="5" destOrd="0" parTransId="{8DF13AD6-DC7B-46E4-AAC2-C96B7A827CA0}" sibTransId="{7BF5EA0E-4141-4445-8066-0C44ADEBB4EE}"/>
+    <dgm:cxn modelId="{2CE9FECF-31A1-4521-B4B0-23516FB6B729}" srcId="{DAD1C9E6-FAD3-47C3-B8FB-04C764464C29}" destId="{7C1A1444-16FD-4228-8A13-24F7854DC7DA}" srcOrd="2" destOrd="0" parTransId="{3BCAE110-3A9B-4825-88F0-3675F2AC3AEC}" sibTransId="{D1415C7D-46D2-4404-9C65-5BB01F490124}"/>
     <dgm:cxn modelId="{8646AED7-6077-4205-B9DA-FF9A7BE34801}" srcId="{DAD1C9E6-FAD3-47C3-B8FB-04C764464C29}" destId="{06D37081-45DA-4624-ACBF-5B4AABDABFD5}" srcOrd="0" destOrd="0" parTransId="{7B24D107-9152-47B6-B3F5-973A6B7E94E3}" sibTransId="{E2B8EB05-6372-425D-8882-CF91A9505E26}"/>
     <dgm:cxn modelId="{539513D8-FE00-4250-9F0E-8B4E8214ECF4}" type="presOf" srcId="{06D37081-45DA-4624-ACBF-5B4AABDABFD5}" destId="{ABCF3414-B420-408B-98C2-635053F091F0}" srcOrd="0" destOrd="0" presId="urn:microsoft.com/office/officeart/2005/8/layout/vList5"/>
-    <dgm:cxn modelId="{D18FB9E3-010A-442C-B797-375A067B1A55}" type="presOf" srcId="{F4A3F6A9-A391-4EE3-8947-D1DE73CF96AE}" destId="{E73F2A97-BCBE-44DE-A16F-62EC3E77DBCE}" srcOrd="0" destOrd="0" presId="urn:microsoft.com/office/officeart/2005/8/layout/vList5"/>
     <dgm:cxn modelId="{9BF4BBF3-2419-4830-A8CF-0B2CF38C854A}" srcId="{DAD1C9E6-FAD3-47C3-B8FB-04C764464C29}" destId="{88CA96D5-0ECD-450A-B2E5-3C85AB228455}" srcOrd="1" destOrd="0" parTransId="{56175E32-3F48-4FE4-A28A-69035E833E76}" sibTransId="{D3C95F2F-2B1B-4982-8A23-3472E3FEFD14}"/>
     <dgm:cxn modelId="{1245F497-2435-4130-8AAB-6CB780ED161F}" type="presParOf" srcId="{648AEBD6-AC80-4A10-A710-57859C1BCCD5}" destId="{1480FA36-C394-4ED5-BD41-CEE641BE8DAF}" srcOrd="0" destOrd="0" presId="urn:microsoft.com/office/officeart/2005/8/layout/vList5"/>
     <dgm:cxn modelId="{08DDC1AD-6E2B-469E-ACFD-E65F2C296D9F}" type="presParOf" srcId="{1480FA36-C394-4ED5-BD41-CEE641BE8DAF}" destId="{ABCF3414-B420-408B-98C2-635053F091F0}" srcOrd="0" destOrd="0" presId="urn:microsoft.com/office/officeart/2005/8/layout/vList5"/>
@@ -1448,12 +1449,12 @@
     <dgm:cxn modelId="{83090045-A258-46D7-BD42-937C652D0EE3}" type="presParOf" srcId="{648AEBD6-AC80-4A10-A710-57859C1BCCD5}" destId="{7B9D258B-0171-43D6-87DE-ACF9EE617367}" srcOrd="2" destOrd="0" presId="urn:microsoft.com/office/officeart/2005/8/layout/vList5"/>
     <dgm:cxn modelId="{E229C812-9B72-416A-8BAF-DE773F235D98}" type="presParOf" srcId="{7B9D258B-0171-43D6-87DE-ACF9EE617367}" destId="{D298E97B-1053-435B-B844-E182EA94393F}" srcOrd="0" destOrd="0" presId="urn:microsoft.com/office/officeart/2005/8/layout/vList5"/>
     <dgm:cxn modelId="{E35D335C-16DE-42DE-9FB0-C7239482F10F}" type="presParOf" srcId="{648AEBD6-AC80-4A10-A710-57859C1BCCD5}" destId="{6B428D1D-610F-4BC8-AFD1-7AC26B51B150}" srcOrd="3" destOrd="0" presId="urn:microsoft.com/office/officeart/2005/8/layout/vList5"/>
-    <dgm:cxn modelId="{572FD12D-F841-45B9-A325-2BB449E0857C}" type="presParOf" srcId="{648AEBD6-AC80-4A10-A710-57859C1BCCD5}" destId="{2F0D98B7-D3A8-4955-9446-3C65ED446703}" srcOrd="4" destOrd="0" presId="urn:microsoft.com/office/officeart/2005/8/layout/vList5"/>
+    <dgm:cxn modelId="{6C6241FF-451B-458C-9E16-1057599B92AA}" type="presParOf" srcId="{648AEBD6-AC80-4A10-A710-57859C1BCCD5}" destId="{0765A09F-5826-4C45-AA9F-8EEDE92275AE}" srcOrd="4" destOrd="0" presId="urn:microsoft.com/office/officeart/2005/8/layout/vList5"/>
+    <dgm:cxn modelId="{CA79B0F5-8BB3-4060-93DF-179697B1641B}" type="presParOf" srcId="{0765A09F-5826-4C45-AA9F-8EEDE92275AE}" destId="{D29DD54E-9758-43A1-BD48-9F6A5592C825}" srcOrd="0" destOrd="0" presId="urn:microsoft.com/office/officeart/2005/8/layout/vList5"/>
+    <dgm:cxn modelId="{222CF1E4-EDF9-411E-8B2C-FB6EABCA0372}" type="presParOf" srcId="{648AEBD6-AC80-4A10-A710-57859C1BCCD5}" destId="{CD8589CD-EFC2-46A8-8BF9-68D24C4D6FA5}" srcOrd="5" destOrd="0" presId="urn:microsoft.com/office/officeart/2005/8/layout/vList5"/>
+    <dgm:cxn modelId="{572FD12D-F841-45B9-A325-2BB449E0857C}" type="presParOf" srcId="{648AEBD6-AC80-4A10-A710-57859C1BCCD5}" destId="{2F0D98B7-D3A8-4955-9446-3C65ED446703}" srcOrd="6" destOrd="0" presId="urn:microsoft.com/office/officeart/2005/8/layout/vList5"/>
     <dgm:cxn modelId="{E780A611-9EA6-46C7-8122-7073179B6BAA}" type="presParOf" srcId="{2F0D98B7-D3A8-4955-9446-3C65ED446703}" destId="{42FCB565-2F8B-4597-8865-4F997E6E3587}" srcOrd="0" destOrd="0" presId="urn:microsoft.com/office/officeart/2005/8/layout/vList5"/>
-    <dgm:cxn modelId="{4D6EBDD1-3AC2-4E78-BAF3-5397528F0F27}" type="presParOf" srcId="{648AEBD6-AC80-4A10-A710-57859C1BCCD5}" destId="{E7417E10-4266-4E80-B50B-D46C985CDD8D}" srcOrd="5" destOrd="0" presId="urn:microsoft.com/office/officeart/2005/8/layout/vList5"/>
-    <dgm:cxn modelId="{2EA68CE3-B90C-435C-87CC-2962E88AE046}" type="presParOf" srcId="{648AEBD6-AC80-4A10-A710-57859C1BCCD5}" destId="{1B36FCB7-7F0F-42EC-8052-DE4203084CBE}" srcOrd="6" destOrd="0" presId="urn:microsoft.com/office/officeart/2005/8/layout/vList5"/>
-    <dgm:cxn modelId="{CF737B7C-9C1C-4585-A6AF-BDBF0F18C384}" type="presParOf" srcId="{1B36FCB7-7F0F-42EC-8052-DE4203084CBE}" destId="{E73F2A97-BCBE-44DE-A16F-62EC3E77DBCE}" srcOrd="0" destOrd="0" presId="urn:microsoft.com/office/officeart/2005/8/layout/vList5"/>
-    <dgm:cxn modelId="{E0F00B56-609C-4476-9E8A-3A0B4A66AF78}" type="presParOf" srcId="{648AEBD6-AC80-4A10-A710-57859C1BCCD5}" destId="{F079B831-667E-4D3B-9BC2-8237821D7B27}" srcOrd="7" destOrd="0" presId="urn:microsoft.com/office/officeart/2005/8/layout/vList5"/>
+    <dgm:cxn modelId="{4D6EBDD1-3AC2-4E78-BAF3-5397528F0F27}" type="presParOf" srcId="{648AEBD6-AC80-4A10-A710-57859C1BCCD5}" destId="{E7417E10-4266-4E80-B50B-D46C985CDD8D}" srcOrd="7" destOrd="0" presId="urn:microsoft.com/office/officeart/2005/8/layout/vList5"/>
     <dgm:cxn modelId="{4CC2CBB3-C453-4816-8338-2BE03B5BA0E1}" type="presParOf" srcId="{648AEBD6-AC80-4A10-A710-57859C1BCCD5}" destId="{92521C04-8CF3-4253-ACF9-C561B80FFBC1}" srcOrd="8" destOrd="0" presId="urn:microsoft.com/office/officeart/2005/8/layout/vList5"/>
     <dgm:cxn modelId="{35977E60-B8F8-4880-8B2A-288AD96B9DAC}" type="presParOf" srcId="{92521C04-8CF3-4253-ACF9-C561B80FFBC1}" destId="{75C6D2BB-6ED7-405C-B450-5E4D169A4AAB}" srcOrd="0" destOrd="0" presId="urn:microsoft.com/office/officeart/2005/8/layout/vList5"/>
     <dgm:cxn modelId="{C3299448-DC28-4739-AB1F-7C21D1F07224}" type="presParOf" srcId="{648AEBD6-AC80-4A10-A710-57859C1BCCD5}" destId="{87A5F714-D02C-46AF-B470-42B979D13B9A}" srcOrd="9" destOrd="0" presId="urn:microsoft.com/office/officeart/2005/8/layout/vList5"/>
@@ -1641,7 +1642,7 @@
         <a:ext cx="3764216" cy="400605"/>
       </dsp:txXfrm>
     </dsp:sp>
-    <dsp:sp modelId="{42FCB565-2F8B-4597-8865-4F997E6E3587}">
+    <dsp:sp modelId="{D29DD54E-9758-43A1-BD48-9F6A5592C825}">
       <dsp:nvSpPr>
         <dsp:cNvPr id="0" name=""/>
         <dsp:cNvSpPr/>
@@ -1709,7 +1710,7 @@
           </a:pPr>
           <a:r>
             <a:rPr lang="en-US" sz="2300" kern="1200" dirty="0"/>
-            <a:t>Large Language Models</a:t>
+            <a:t>Objectives</a:t>
           </a:r>
         </a:p>
       </dsp:txBody>
@@ -1718,7 +1719,7 @@
         <a:ext cx="3764216" cy="400605"/>
       </dsp:txXfrm>
     </dsp:sp>
-    <dsp:sp modelId="{E73F2A97-BCBE-44DE-A16F-62EC3E77DBCE}">
+    <dsp:sp modelId="{42FCB565-2F8B-4597-8865-4F997E6E3587}">
       <dsp:nvSpPr>
         <dsp:cNvPr id="0" name=""/>
         <dsp:cNvSpPr/>
@@ -1786,7 +1787,7 @@
           </a:pPr>
           <a:r>
             <a:rPr lang="en-US" sz="2300" kern="1200" dirty="0"/>
-            <a:t>Objectives</a:t>
+            <a:t>Large Language Models</a:t>
           </a:r>
         </a:p>
       </dsp:txBody>
@@ -4177,7 +4178,7 @@
           <a:p>
             <a:fld id="{ABF9B36D-3B2C-4E81-92F7-987D475A4FBF}" type="datetimeFigureOut">
               <a:rPr lang="en-US" smtClean="0"/>
-              <a:t>5/24/2025</a:t>
+              <a:t>5/25/2025</a:t>
             </a:fld>
             <a:endParaRPr lang="en-US"/>
           </a:p>
@@ -4428,7 +4429,7 @@
           <a:p>
             <a:fld id="{ABF9B36D-3B2C-4E81-92F7-987D475A4FBF}" type="datetimeFigureOut">
               <a:rPr lang="en-US" smtClean="0"/>
-              <a:t>5/24/2025</a:t>
+              <a:t>5/25/2025</a:t>
             </a:fld>
             <a:endParaRPr lang="en-US"/>
           </a:p>
@@ -4742,7 +4743,7 @@
           <a:p>
             <a:fld id="{ABF9B36D-3B2C-4E81-92F7-987D475A4FBF}" type="datetimeFigureOut">
               <a:rPr lang="en-US" smtClean="0"/>
-              <a:t>5/24/2025</a:t>
+              <a:t>5/25/2025</a:t>
             </a:fld>
             <a:endParaRPr lang="en-US"/>
           </a:p>
@@ -5069,7 +5070,7 @@
           <a:p>
             <a:fld id="{ABF9B36D-3B2C-4E81-92F7-987D475A4FBF}" type="datetimeFigureOut">
               <a:rPr lang="en-US" smtClean="0"/>
-              <a:t>5/24/2025</a:t>
+              <a:t>5/25/2025</a:t>
             </a:fld>
             <a:endParaRPr lang="en-US"/>
           </a:p>
@@ -5383,7 +5384,7 @@
           <a:p>
             <a:fld id="{ABF9B36D-3B2C-4E81-92F7-987D475A4FBF}" type="datetimeFigureOut">
               <a:rPr lang="en-US" smtClean="0"/>
-              <a:t>5/24/2025</a:t>
+              <a:t>5/25/2025</a:t>
             </a:fld>
             <a:endParaRPr lang="en-US"/>
           </a:p>
@@ -5770,7 +5771,7 @@
           <a:p>
             <a:fld id="{ABF9B36D-3B2C-4E81-92F7-987D475A4FBF}" type="datetimeFigureOut">
               <a:rPr lang="en-US" smtClean="0"/>
-              <a:t>5/24/2025</a:t>
+              <a:t>5/25/2025</a:t>
             </a:fld>
             <a:endParaRPr lang="en-US"/>
           </a:p>
@@ -5940,7 +5941,7 @@
           <a:p>
             <a:fld id="{ABF9B36D-3B2C-4E81-92F7-987D475A4FBF}" type="datetimeFigureOut">
               <a:rPr lang="en-US" smtClean="0"/>
-              <a:t>5/24/2025</a:t>
+              <a:t>5/25/2025</a:t>
             </a:fld>
             <a:endParaRPr lang="en-US"/>
           </a:p>
@@ -6120,7 +6121,7 @@
           <a:p>
             <a:fld id="{ABF9B36D-3B2C-4E81-92F7-987D475A4FBF}" type="datetimeFigureOut">
               <a:rPr lang="en-US" smtClean="0"/>
-              <a:t>5/24/2025</a:t>
+              <a:t>5/25/2025</a:t>
             </a:fld>
             <a:endParaRPr lang="en-US"/>
           </a:p>
@@ -6290,7 +6291,7 @@
           <a:p>
             <a:fld id="{ABF9B36D-3B2C-4E81-92F7-987D475A4FBF}" type="datetimeFigureOut">
               <a:rPr lang="en-US" smtClean="0"/>
-              <a:t>5/24/2025</a:t>
+              <a:t>5/25/2025</a:t>
             </a:fld>
             <a:endParaRPr lang="en-US"/>
           </a:p>
@@ -6537,7 +6538,7 @@
           <a:p>
             <a:fld id="{ABF9B36D-3B2C-4E81-92F7-987D475A4FBF}" type="datetimeFigureOut">
               <a:rPr lang="en-US" smtClean="0"/>
-              <a:t>5/24/2025</a:t>
+              <a:t>5/25/2025</a:t>
             </a:fld>
             <a:endParaRPr lang="en-US"/>
           </a:p>
@@ -6769,7 +6770,7 @@
           <a:p>
             <a:fld id="{ABF9B36D-3B2C-4E81-92F7-987D475A4FBF}" type="datetimeFigureOut">
               <a:rPr lang="en-US" smtClean="0"/>
-              <a:t>5/24/2025</a:t>
+              <a:t>5/25/2025</a:t>
             </a:fld>
             <a:endParaRPr lang="en-US"/>
           </a:p>
@@ -7143,7 +7144,7 @@
           <a:p>
             <a:fld id="{ABF9B36D-3B2C-4E81-92F7-987D475A4FBF}" type="datetimeFigureOut">
               <a:rPr lang="en-US" smtClean="0"/>
-              <a:t>5/24/2025</a:t>
+              <a:t>5/25/2025</a:t>
             </a:fld>
             <a:endParaRPr lang="en-US"/>
           </a:p>
@@ -7266,7 +7267,7 @@
           <a:p>
             <a:fld id="{ABF9B36D-3B2C-4E81-92F7-987D475A4FBF}" type="datetimeFigureOut">
               <a:rPr lang="en-US" smtClean="0"/>
-              <a:t>5/24/2025</a:t>
+              <a:t>5/25/2025</a:t>
             </a:fld>
             <a:endParaRPr lang="en-US"/>
           </a:p>
@@ -7361,7 +7362,7 @@
           <a:p>
             <a:fld id="{ABF9B36D-3B2C-4E81-92F7-987D475A4FBF}" type="datetimeFigureOut">
               <a:rPr lang="en-US" smtClean="0"/>
-              <a:t>5/24/2025</a:t>
+              <a:t>5/25/2025</a:t>
             </a:fld>
             <a:endParaRPr lang="en-US"/>
           </a:p>
@@ -7616,7 +7617,7 @@
           <a:p>
             <a:fld id="{ABF9B36D-3B2C-4E81-92F7-987D475A4FBF}" type="datetimeFigureOut">
               <a:rPr lang="en-US" smtClean="0"/>
-              <a:t>5/24/2025</a:t>
+              <a:t>5/25/2025</a:t>
             </a:fld>
             <a:endParaRPr lang="en-US"/>
           </a:p>
@@ -7879,7 +7880,7 @@
           <a:p>
             <a:fld id="{ABF9B36D-3B2C-4E81-92F7-987D475A4FBF}" type="datetimeFigureOut">
               <a:rPr lang="en-US" smtClean="0"/>
-              <a:t>5/24/2025</a:t>
+              <a:t>5/25/2025</a:t>
             </a:fld>
             <a:endParaRPr lang="en-US"/>
           </a:p>
@@ -8624,7 +8625,7 @@
           <a:p>
             <a:fld id="{ABF9B36D-3B2C-4E81-92F7-987D475A4FBF}" type="datetimeFigureOut">
               <a:rPr lang="en-US" smtClean="0"/>
-              <a:t>5/24/2025</a:t>
+              <a:t>5/25/2025</a:t>
             </a:fld>
             <a:endParaRPr lang="en-US"/>
           </a:p>
@@ -9329,6 +9330,86 @@
 <file path=ppt/slides/slide10.xml><?xml version="1.0" encoding="utf-8"?>
 <p:sld xmlns:a="http://schemas.openxmlformats.org/drawingml/2006/main" xmlns:r="http://schemas.openxmlformats.org/officeDocument/2006/relationships" xmlns:p="http://schemas.openxmlformats.org/presentationml/2006/main">
   <p:cSld>
+    <p:spTree>
+      <p:nvGrpSpPr>
+        <p:cNvPr id="1" name=""/>
+        <p:cNvGrpSpPr/>
+        <p:nvPr/>
+      </p:nvGrpSpPr>
+      <p:grpSpPr>
+        <a:xfrm>
+          <a:off x="0" y="0"/>
+          <a:ext cx="0" cy="0"/>
+          <a:chOff x="0" y="0"/>
+          <a:chExt cx="0" cy="0"/>
+        </a:xfrm>
+      </p:grpSpPr>
+      <p:sp>
+        <p:nvSpPr>
+          <p:cNvPr id="2" name="Title 1">
+            <a:extLst>
+              <a:ext uri="{FF2B5EF4-FFF2-40B4-BE49-F238E27FC236}">
+                <a16:creationId xmlns:a16="http://schemas.microsoft.com/office/drawing/2014/main" id="{B238884A-5BAC-2750-7802-57CB045C94A4}"/>
+              </a:ext>
+            </a:extLst>
+          </p:cNvPr>
+          <p:cNvSpPr>
+            <a:spLocks noGrp="1"/>
+          </p:cNvSpPr>
+          <p:nvPr>
+            <p:ph type="title"/>
+          </p:nvPr>
+        </p:nvSpPr>
+        <p:spPr/>
+        <p:txBody>
+          <a:bodyPr/>
+          <a:lstStyle/>
+          <a:p>
+            <a:endParaRPr lang="en-US"/>
+          </a:p>
+        </p:txBody>
+      </p:sp>
+      <p:sp>
+        <p:nvSpPr>
+          <p:cNvPr id="3" name="Content Placeholder 2">
+            <a:extLst>
+              <a:ext uri="{FF2B5EF4-FFF2-40B4-BE49-F238E27FC236}">
+                <a16:creationId xmlns:a16="http://schemas.microsoft.com/office/drawing/2014/main" id="{9F75DA6D-F868-2D25-50F5-7347A3507914}"/>
+              </a:ext>
+            </a:extLst>
+          </p:cNvPr>
+          <p:cNvSpPr>
+            <a:spLocks noGrp="1"/>
+          </p:cNvSpPr>
+          <p:nvPr>
+            <p:ph idx="1"/>
+          </p:nvPr>
+        </p:nvSpPr>
+        <p:spPr/>
+        <p:txBody>
+          <a:bodyPr/>
+          <a:lstStyle/>
+          <a:p>
+            <a:endParaRPr lang="en-US"/>
+          </a:p>
+        </p:txBody>
+      </p:sp>
+    </p:spTree>
+    <p:extLst>
+      <p:ext uri="{BB962C8B-B14F-4D97-AF65-F5344CB8AC3E}">
+        <p14:creationId xmlns:p14="http://schemas.microsoft.com/office/powerpoint/2010/main" val="404403540"/>
+      </p:ext>
+    </p:extLst>
+  </p:cSld>
+  <p:clrMapOvr>
+    <a:masterClrMapping/>
+  </p:clrMapOvr>
+</p:sld>
+</file>
+
+<file path=ppt/slides/slide11.xml><?xml version="1.0" encoding="utf-8"?>
+<p:sld xmlns:a="http://schemas.openxmlformats.org/drawingml/2006/main" xmlns:r="http://schemas.openxmlformats.org/officeDocument/2006/relationships" xmlns:p="http://schemas.openxmlformats.org/presentationml/2006/main">
+  <p:cSld>
     <p:bg>
       <p:bgPr>
         <a:solidFill>
@@ -9763,7 +9844,7 @@
 </p:sld>
 </file>
 
-<file path=ppt/slides/slide11.xml><?xml version="1.0" encoding="utf-8"?>
+<file path=ppt/slides/slide12.xml><?xml version="1.0" encoding="utf-8"?>
 <p:sld xmlns:a="http://schemas.openxmlformats.org/drawingml/2006/main" xmlns:r="http://schemas.openxmlformats.org/officeDocument/2006/relationships" xmlns:p="http://schemas.openxmlformats.org/presentationml/2006/main">
   <p:cSld>
     <p:bg>
@@ -9943,7 +10024,7 @@
 </p:sld>
 </file>
 
-<file path=ppt/slides/slide12.xml><?xml version="1.0" encoding="utf-8"?>
+<file path=ppt/slides/slide13.xml><?xml version="1.0" encoding="utf-8"?>
 <p:sld xmlns:a="http://schemas.openxmlformats.org/drawingml/2006/main" xmlns:r="http://schemas.openxmlformats.org/officeDocument/2006/relationships" xmlns:p="http://schemas.openxmlformats.org/presentationml/2006/main">
   <p:cSld>
     <p:spTree>
@@ -10026,7 +10107,7 @@
 </p:sld>
 </file>
 
-<file path=ppt/slides/slide13.xml><?xml version="1.0" encoding="utf-8"?>
+<file path=ppt/slides/slide14.xml><?xml version="1.0" encoding="utf-8"?>
 <p:sld xmlns:a="http://schemas.openxmlformats.org/drawingml/2006/main" xmlns:r="http://schemas.openxmlformats.org/officeDocument/2006/relationships" xmlns:p="http://schemas.openxmlformats.org/presentationml/2006/main">
   <p:cSld>
     <p:bg>
@@ -10219,7 +10300,7 @@
 </p:sld>
 </file>
 
-<file path=ppt/slides/slide14.xml><?xml version="1.0" encoding="utf-8"?>
+<file path=ppt/slides/slide15.xml><?xml version="1.0" encoding="utf-8"?>
 <p:sld xmlns:a="http://schemas.openxmlformats.org/drawingml/2006/main" xmlns:r="http://schemas.openxmlformats.org/officeDocument/2006/relationships" xmlns:p="http://schemas.openxmlformats.org/presentationml/2006/main">
   <p:cSld>
     <p:spTree>
@@ -10299,7 +10380,7 @@
 </p:sld>
 </file>
 
-<file path=ppt/slides/slide15.xml><?xml version="1.0" encoding="utf-8"?>
+<file path=ppt/slides/slide16.xml><?xml version="1.0" encoding="utf-8"?>
 <p:sld xmlns:a="http://schemas.openxmlformats.org/drawingml/2006/main" xmlns:r="http://schemas.openxmlformats.org/officeDocument/2006/relationships" xmlns:p="http://schemas.openxmlformats.org/presentationml/2006/main">
   <p:cSld>
     <p:bg>
@@ -10698,7 +10779,7 @@
 </p:sld>
 </file>
 
-<file path=ppt/slides/slide16.xml><?xml version="1.0" encoding="utf-8"?>
+<file path=ppt/slides/slide17.xml><?xml version="1.0" encoding="utf-8"?>
 <p:sld xmlns:a="http://schemas.openxmlformats.org/drawingml/2006/main" xmlns:r="http://schemas.openxmlformats.org/officeDocument/2006/relationships" xmlns:p="http://schemas.openxmlformats.org/presentationml/2006/main">
   <p:cSld>
     <p:spTree>
@@ -10781,7 +10862,7 @@
 </p:sld>
 </file>
 
-<file path=ppt/slides/slide17.xml><?xml version="1.0" encoding="utf-8"?>
+<file path=ppt/slides/slide18.xml><?xml version="1.0" encoding="utf-8"?>
 <p:sld xmlns:a="http://schemas.openxmlformats.org/drawingml/2006/main" xmlns:r="http://schemas.openxmlformats.org/officeDocument/2006/relationships" xmlns:p="http://schemas.openxmlformats.org/presentationml/2006/main">
   <p:cSld>
     <p:bg>
@@ -11672,7 +11753,7 @@
 </p:sld>
 </file>
 
-<file path=ppt/slides/slide18.xml><?xml version="1.0" encoding="utf-8"?>
+<file path=ppt/slides/slide19.xml><?xml version="1.0" encoding="utf-8"?>
 <p:sld xmlns:a="http://schemas.openxmlformats.org/drawingml/2006/main" xmlns:r="http://schemas.openxmlformats.org/officeDocument/2006/relationships" xmlns:p="http://schemas.openxmlformats.org/presentationml/2006/main">
   <p:cSld>
     <p:spTree>
@@ -13047,7 +13128,115 @@
 </p:sld>
 </file>
 
-<file path=ppt/slides/slide19.xml><?xml version="1.0" encoding="utf-8"?>
+<file path=ppt/slides/slide2.xml><?xml version="1.0" encoding="utf-8"?>
+<p:sld xmlns:a="http://schemas.openxmlformats.org/drawingml/2006/main" xmlns:r="http://schemas.openxmlformats.org/officeDocument/2006/relationships" xmlns:p="http://schemas.openxmlformats.org/presentationml/2006/main">
+  <p:cSld>
+    <p:bg>
+      <p:bgPr>
+        <a:solidFill>
+          <a:schemeClr val="bg1"/>
+        </a:solidFill>
+        <a:effectLst/>
+      </p:bgPr>
+    </p:bg>
+    <p:spTree>
+      <p:nvGrpSpPr>
+        <p:cNvPr id="1" name=""/>
+        <p:cNvGrpSpPr/>
+        <p:nvPr/>
+      </p:nvGrpSpPr>
+      <p:grpSpPr>
+        <a:xfrm>
+          <a:off x="0" y="0"/>
+          <a:ext cx="0" cy="0"/>
+          <a:chOff x="0" y="0"/>
+          <a:chExt cx="0" cy="0"/>
+        </a:xfrm>
+      </p:grpSpPr>
+      <p:sp>
+        <p:nvSpPr>
+          <p:cNvPr id="2" name="Title 1">
+            <a:extLst>
+              <a:ext uri="{FF2B5EF4-FFF2-40B4-BE49-F238E27FC236}">
+                <a16:creationId xmlns:a16="http://schemas.microsoft.com/office/drawing/2014/main" id="{4CEE9609-7661-4718-DC5B-69B792C0ABC0}"/>
+              </a:ext>
+            </a:extLst>
+          </p:cNvPr>
+          <p:cNvSpPr>
+            <a:spLocks noGrp="1"/>
+          </p:cNvSpPr>
+          <p:nvPr>
+            <p:ph type="title"/>
+          </p:nvPr>
+        </p:nvSpPr>
+        <p:spPr>
+          <a:xfrm>
+            <a:off x="1759287" y="798881"/>
+            <a:ext cx="8673427" cy="1048945"/>
+          </a:xfrm>
+        </p:spPr>
+        <p:txBody>
+          <a:bodyPr>
+            <a:normAutofit/>
+          </a:bodyPr>
+          <a:lstStyle/>
+          <a:p>
+            <a:r>
+              <a:rPr lang="en-US" dirty="0">
+                <a:solidFill>
+                  <a:schemeClr val="tx1"/>
+                </a:solidFill>
+              </a:rPr>
+              <a:t>Table Of Contents</a:t>
+            </a:r>
+          </a:p>
+        </p:txBody>
+      </p:sp>
+      <p:graphicFrame>
+        <p:nvGraphicFramePr>
+          <p:cNvPr id="5" name="Content Placeholder 2">
+            <a:extLst>
+              <a:ext uri="{FF2B5EF4-FFF2-40B4-BE49-F238E27FC236}">
+                <a16:creationId xmlns:a16="http://schemas.microsoft.com/office/drawing/2014/main" id="{1E6951C9-B560-3CA9-C1DD-386B5FA64B4A}"/>
+              </a:ext>
+            </a:extLst>
+          </p:cNvPr>
+          <p:cNvGraphicFramePr>
+            <a:graphicFrameLocks noGrp="1"/>
+          </p:cNvGraphicFramePr>
+          <p:nvPr>
+            <p:ph idx="1"/>
+            <p:extLst>
+              <p:ext uri="{D42A27DB-BD31-4B8C-83A1-F6EECF244321}">
+                <p14:modId xmlns:p14="http://schemas.microsoft.com/office/powerpoint/2010/main" val="1807970856"/>
+              </p:ext>
+            </p:extLst>
+          </p:nvPr>
+        </p:nvGraphicFramePr>
+        <p:xfrm>
+          <a:off x="807722" y="1990976"/>
+          <a:ext cx="10576558" cy="4175468"/>
+        </p:xfrm>
+        <a:graphic>
+          <a:graphicData uri="http://schemas.openxmlformats.org/drawingml/2006/diagram">
+            <dgm:relIds xmlns:dgm="http://schemas.openxmlformats.org/drawingml/2006/diagram" xmlns:r="http://schemas.openxmlformats.org/officeDocument/2006/relationships" r:dm="rId2" r:lo="rId3" r:qs="rId4" r:cs="rId5"/>
+          </a:graphicData>
+        </a:graphic>
+      </p:graphicFrame>
+    </p:spTree>
+    <p:extLst>
+      <p:ext uri="{BB962C8B-B14F-4D97-AF65-F5344CB8AC3E}">
+        <p14:creationId xmlns:p14="http://schemas.microsoft.com/office/powerpoint/2010/main" val="357325899"/>
+      </p:ext>
+    </p:extLst>
+  </p:cSld>
+  <p:clrMapOvr>
+    <a:masterClrMapping/>
+  </p:clrMapOvr>
+</p:sld>
+</file>
+
+<file path=ppt/slides/slide20.xml><?xml version="1.0" encoding="utf-8"?>
 <p:sld xmlns:a="http://schemas.openxmlformats.org/drawingml/2006/main" xmlns:r="http://schemas.openxmlformats.org/officeDocument/2006/relationships" xmlns:p="http://schemas.openxmlformats.org/presentationml/2006/main">
   <p:cSld>
     <p:spTree>
@@ -14116,115 +14305,7 @@
 </p:sld>
 </file>
 
-<file path=ppt/slides/slide2.xml><?xml version="1.0" encoding="utf-8"?>
-<p:sld xmlns:a="http://schemas.openxmlformats.org/drawingml/2006/main" xmlns:r="http://schemas.openxmlformats.org/officeDocument/2006/relationships" xmlns:p="http://schemas.openxmlformats.org/presentationml/2006/main">
-  <p:cSld>
-    <p:bg>
-      <p:bgPr>
-        <a:solidFill>
-          <a:schemeClr val="bg1"/>
-        </a:solidFill>
-        <a:effectLst/>
-      </p:bgPr>
-    </p:bg>
-    <p:spTree>
-      <p:nvGrpSpPr>
-        <p:cNvPr id="1" name=""/>
-        <p:cNvGrpSpPr/>
-        <p:nvPr/>
-      </p:nvGrpSpPr>
-      <p:grpSpPr>
-        <a:xfrm>
-          <a:off x="0" y="0"/>
-          <a:ext cx="0" cy="0"/>
-          <a:chOff x="0" y="0"/>
-          <a:chExt cx="0" cy="0"/>
-        </a:xfrm>
-      </p:grpSpPr>
-      <p:sp>
-        <p:nvSpPr>
-          <p:cNvPr id="2" name="Title 1">
-            <a:extLst>
-              <a:ext uri="{FF2B5EF4-FFF2-40B4-BE49-F238E27FC236}">
-                <a16:creationId xmlns:a16="http://schemas.microsoft.com/office/drawing/2014/main" id="{4CEE9609-7661-4718-DC5B-69B792C0ABC0}"/>
-              </a:ext>
-            </a:extLst>
-          </p:cNvPr>
-          <p:cNvSpPr>
-            <a:spLocks noGrp="1"/>
-          </p:cNvSpPr>
-          <p:nvPr>
-            <p:ph type="title"/>
-          </p:nvPr>
-        </p:nvSpPr>
-        <p:spPr>
-          <a:xfrm>
-            <a:off x="1759287" y="798881"/>
-            <a:ext cx="8673427" cy="1048945"/>
-          </a:xfrm>
-        </p:spPr>
-        <p:txBody>
-          <a:bodyPr>
-            <a:normAutofit/>
-          </a:bodyPr>
-          <a:lstStyle/>
-          <a:p>
-            <a:r>
-              <a:rPr lang="en-US" dirty="0">
-                <a:solidFill>
-                  <a:schemeClr val="tx1"/>
-                </a:solidFill>
-              </a:rPr>
-              <a:t>Table Of Contents</a:t>
-            </a:r>
-          </a:p>
-        </p:txBody>
-      </p:sp>
-      <p:graphicFrame>
-        <p:nvGraphicFramePr>
-          <p:cNvPr id="5" name="Content Placeholder 2">
-            <a:extLst>
-              <a:ext uri="{FF2B5EF4-FFF2-40B4-BE49-F238E27FC236}">
-                <a16:creationId xmlns:a16="http://schemas.microsoft.com/office/drawing/2014/main" id="{1E6951C9-B560-3CA9-C1DD-386B5FA64B4A}"/>
-              </a:ext>
-            </a:extLst>
-          </p:cNvPr>
-          <p:cNvGraphicFramePr>
-            <a:graphicFrameLocks noGrp="1"/>
-          </p:cNvGraphicFramePr>
-          <p:nvPr>
-            <p:ph idx="1"/>
-            <p:extLst>
-              <p:ext uri="{D42A27DB-BD31-4B8C-83A1-F6EECF244321}">
-                <p14:modId xmlns:p14="http://schemas.microsoft.com/office/powerpoint/2010/main" val="3899444098"/>
-              </p:ext>
-            </p:extLst>
-          </p:nvPr>
-        </p:nvGraphicFramePr>
-        <p:xfrm>
-          <a:off x="807722" y="1990976"/>
-          <a:ext cx="10576558" cy="4175468"/>
-        </p:xfrm>
-        <a:graphic>
-          <a:graphicData uri="http://schemas.openxmlformats.org/drawingml/2006/diagram">
-            <dgm:relIds xmlns:dgm="http://schemas.openxmlformats.org/drawingml/2006/diagram" xmlns:r="http://schemas.openxmlformats.org/officeDocument/2006/relationships" r:dm="rId2" r:lo="rId3" r:qs="rId4" r:cs="rId5"/>
-          </a:graphicData>
-        </a:graphic>
-      </p:graphicFrame>
-    </p:spTree>
-    <p:extLst>
-      <p:ext uri="{BB962C8B-B14F-4D97-AF65-F5344CB8AC3E}">
-        <p14:creationId xmlns:p14="http://schemas.microsoft.com/office/powerpoint/2010/main" val="357325899"/>
-      </p:ext>
-    </p:extLst>
-  </p:cSld>
-  <p:clrMapOvr>
-    <a:masterClrMapping/>
-  </p:clrMapOvr>
-</p:sld>
-</file>
-
-<file path=ppt/slides/slide20.xml><?xml version="1.0" encoding="utf-8"?>
+<file path=ppt/slides/slide21.xml><?xml version="1.0" encoding="utf-8"?>
 <p:sld xmlns:a="http://schemas.openxmlformats.org/drawingml/2006/main" xmlns:r="http://schemas.openxmlformats.org/officeDocument/2006/relationships" xmlns:p="http://schemas.openxmlformats.org/presentationml/2006/main">
   <p:cSld>
     <p:spTree>
@@ -15876,7 +15957,7 @@
 </p:sld>
 </file>
 
-<file path=ppt/slides/slide21.xml><?xml version="1.0" encoding="utf-8"?>
+<file path=ppt/slides/slide22.xml><?xml version="1.0" encoding="utf-8"?>
 <p:sld xmlns:a="http://schemas.openxmlformats.org/drawingml/2006/main" xmlns:r="http://schemas.openxmlformats.org/officeDocument/2006/relationships" xmlns:p="http://schemas.openxmlformats.org/presentationml/2006/main">
   <p:cSld>
     <p:spTree>
@@ -16168,7 +16249,7 @@
 </p:sld>
 </file>
 
-<file path=ppt/slides/slide22.xml><?xml version="1.0" encoding="utf-8"?>
+<file path=ppt/slides/slide23.xml><?xml version="1.0" encoding="utf-8"?>
 <p:sld xmlns:a="http://schemas.openxmlformats.org/drawingml/2006/main" xmlns:r="http://schemas.openxmlformats.org/officeDocument/2006/relationships" xmlns:p="http://schemas.openxmlformats.org/presentationml/2006/main">
   <p:cSld>
     <p:spTree>
@@ -16460,7 +16541,7 @@
 </p:sld>
 </file>
 
-<file path=ppt/slides/slide23.xml><?xml version="1.0" encoding="utf-8"?>
+<file path=ppt/slides/slide24.xml><?xml version="1.0" encoding="utf-8"?>
 <p:sld xmlns:a="http://schemas.openxmlformats.org/drawingml/2006/main" xmlns:r="http://schemas.openxmlformats.org/officeDocument/2006/relationships" xmlns:p="http://schemas.openxmlformats.org/presentationml/2006/main">
   <p:cSld>
     <p:spTree>
@@ -17147,7 +17228,7 @@
 </p:sld>
 </file>
 
-<file path=ppt/slides/slide24.xml><?xml version="1.0" encoding="utf-8"?>
+<file path=ppt/slides/slide25.xml><?xml version="1.0" encoding="utf-8"?>
 <p:sld xmlns:a="http://schemas.openxmlformats.org/drawingml/2006/main" xmlns:r="http://schemas.openxmlformats.org/officeDocument/2006/relationships" xmlns:p="http://schemas.openxmlformats.org/presentationml/2006/main">
   <p:cSld>
     <p:spTree>
@@ -18960,7 +19041,7 @@
 </p:sld>
 </file>
 
-<file path=ppt/slides/slide25.xml><?xml version="1.0" encoding="utf-8"?>
+<file path=ppt/slides/slide26.xml><?xml version="1.0" encoding="utf-8"?>
 <p:sld xmlns:a="http://schemas.openxmlformats.org/drawingml/2006/main" xmlns:r="http://schemas.openxmlformats.org/officeDocument/2006/relationships" xmlns:p="http://schemas.openxmlformats.org/presentationml/2006/main">
   <p:cSld>
     <p:spTree>
@@ -19170,7 +19251,7 @@
 </p:sld>
 </file>
 
-<file path=ppt/slides/slide26.xml><?xml version="1.0" encoding="utf-8"?>
+<file path=ppt/slides/slide27.xml><?xml version="1.0" encoding="utf-8"?>
 <p:sld xmlns:a="http://schemas.openxmlformats.org/drawingml/2006/main" xmlns:r="http://schemas.openxmlformats.org/officeDocument/2006/relationships" xmlns:p="http://schemas.openxmlformats.org/presentationml/2006/main">
   <p:cSld>
     <p:spTree>
@@ -19380,7 +19461,7 @@
 </p:sld>
 </file>
 
-<file path=ppt/slides/slide27.xml><?xml version="1.0" encoding="utf-8"?>
+<file path=ppt/slides/slide28.xml><?xml version="1.0" encoding="utf-8"?>
 <p:sld xmlns:a="http://schemas.openxmlformats.org/drawingml/2006/main" xmlns:r="http://schemas.openxmlformats.org/officeDocument/2006/relationships" xmlns:p="http://schemas.openxmlformats.org/presentationml/2006/main">
   <p:cSld>
     <p:spTree>
@@ -20304,7 +20385,7 @@
 </p:sld>
 </file>
 
-<file path=ppt/slides/slide28.xml><?xml version="1.0" encoding="utf-8"?>
+<file path=ppt/slides/slide29.xml><?xml version="1.0" encoding="utf-8"?>
 <p:sld xmlns:a="http://schemas.openxmlformats.org/drawingml/2006/main" xmlns:r="http://schemas.openxmlformats.org/officeDocument/2006/relationships" xmlns:p="http://schemas.openxmlformats.org/presentationml/2006/main">
   <p:cSld>
     <p:bg>
@@ -20487,386 +20568,6 @@
     <p:extLst>
       <p:ext uri="{BB962C8B-B14F-4D97-AF65-F5344CB8AC3E}">
         <p14:creationId xmlns:p14="http://schemas.microsoft.com/office/powerpoint/2010/main" val="3643520442"/>
-      </p:ext>
-    </p:extLst>
-  </p:cSld>
-  <p:clrMapOvr>
-    <a:masterClrMapping/>
-  </p:clrMapOvr>
-</p:sld>
-</file>
-
-<file path=ppt/slides/slide29.xml><?xml version="1.0" encoding="utf-8"?>
-<p:sld xmlns:a="http://schemas.openxmlformats.org/drawingml/2006/main" xmlns:r="http://schemas.openxmlformats.org/officeDocument/2006/relationships" xmlns:p="http://schemas.openxmlformats.org/presentationml/2006/main">
-  <p:cSld>
-    <p:bg>
-      <p:bgPr>
-        <a:solidFill>
-          <a:schemeClr val="bg1"/>
-        </a:solidFill>
-        <a:effectLst/>
-      </p:bgPr>
-    </p:bg>
-    <p:spTree>
-      <p:nvGrpSpPr>
-        <p:cNvPr id="1" name=""/>
-        <p:cNvGrpSpPr/>
-        <p:nvPr/>
-      </p:nvGrpSpPr>
-      <p:grpSpPr>
-        <a:xfrm>
-          <a:off x="0" y="0"/>
-          <a:ext cx="0" cy="0"/>
-          <a:chOff x="0" y="0"/>
-          <a:chExt cx="0" cy="0"/>
-        </a:xfrm>
-      </p:grpSpPr>
-      <p:sp>
-        <p:nvSpPr>
-          <p:cNvPr id="2" name="Title 1">
-            <a:extLst>
-              <a:ext uri="{FF2B5EF4-FFF2-40B4-BE49-F238E27FC236}">
-                <a16:creationId xmlns:a16="http://schemas.microsoft.com/office/drawing/2014/main" id="{8D08BC73-D9AB-6B0E-1539-76D2A001F463}"/>
-              </a:ext>
-            </a:extLst>
-          </p:cNvPr>
-          <p:cNvSpPr>
-            <a:spLocks noGrp="1"/>
-          </p:cNvSpPr>
-          <p:nvPr>
-            <p:ph type="title"/>
-          </p:nvPr>
-        </p:nvSpPr>
-        <p:spPr>
-          <a:xfrm>
-            <a:off x="2849562" y="609600"/>
-            <a:ext cx="6424440" cy="1320800"/>
-          </a:xfrm>
-        </p:spPr>
-        <p:txBody>
-          <a:bodyPr>
-            <a:normAutofit/>
-          </a:bodyPr>
-          <a:lstStyle/>
-          <a:p>
-            <a:r>
-              <a:rPr lang="en-US" dirty="0"/>
-              <a:t>Future Work</a:t>
-            </a:r>
-          </a:p>
-        </p:txBody>
-      </p:sp>
-      <p:sp>
-        <p:nvSpPr>
-          <p:cNvPr id="9" name="Isosceles Triangle 8">
-            <a:extLst>
-              <a:ext uri="{FF2B5EF4-FFF2-40B4-BE49-F238E27FC236}">
-                <a16:creationId xmlns:a16="http://schemas.microsoft.com/office/drawing/2014/main" id="{9F8803AC-EE0E-40C2-AD46-FD84FAD82220}"/>
-              </a:ext>
-              <a:ext uri="{C183D7F6-B498-43B3-948B-1728B52AA6E4}">
-                <adec:decorative xmlns:adec="http://schemas.microsoft.com/office/drawing/2017/decorative" val="1"/>
-              </a:ext>
-            </a:extLst>
-          </p:cNvPr>
-          <p:cNvSpPr>
-            <a:spLocks noGrp="1" noRot="1" noChangeAspect="1" noMove="1" noResize="1" noEditPoints="1" noAdjustHandles="1" noChangeArrowheads="1" noChangeShapeType="1" noTextEdit="1"/>
-          </p:cNvSpPr>
-          <p:nvPr>
-            <p:extLst>
-              <p:ext uri="{386F3935-93C4-4BCD-93E2-E3B085C9AB24}">
-                <p16:designElem xmlns:p16="http://schemas.microsoft.com/office/powerpoint/2015/main" val="1"/>
-              </p:ext>
-            </p:extLst>
-          </p:nvPr>
-        </p:nvSpPr>
-        <p:spPr>
-          <a:xfrm>
-            <a:off x="870916" y="3822970"/>
-            <a:ext cx="496112" cy="2918298"/>
-          </a:xfrm>
-          <a:prstGeom prst="triangle">
-            <a:avLst>
-              <a:gd name="adj" fmla="val 0"/>
-            </a:avLst>
-          </a:prstGeom>
-          <a:solidFill>
-            <a:schemeClr val="accent1">
-              <a:alpha val="85000"/>
-            </a:schemeClr>
-          </a:solidFill>
-          <a:ln>
-            <a:noFill/>
-          </a:ln>
-          <a:effectLst/>
-        </p:spPr>
-        <p:style>
-          <a:lnRef idx="1">
-            <a:schemeClr val="accent1"/>
-          </a:lnRef>
-          <a:fillRef idx="3">
-            <a:schemeClr val="accent1"/>
-          </a:fillRef>
-          <a:effectRef idx="2">
-            <a:schemeClr val="accent1"/>
-          </a:effectRef>
-          <a:fontRef idx="minor">
-            <a:schemeClr val="lt1"/>
-          </a:fontRef>
-        </p:style>
-        <p:txBody>
-          <a:bodyPr/>
-          <a:lstStyle/>
-          <a:p>
-            <a:endParaRPr lang="en-US"/>
-          </a:p>
-        </p:txBody>
-      </p:sp>
-      <p:pic>
-        <p:nvPicPr>
-          <p:cNvPr id="5" name="Picture 4" descr="Digital financial graph">
-            <a:extLst>
-              <a:ext uri="{FF2B5EF4-FFF2-40B4-BE49-F238E27FC236}">
-                <a16:creationId xmlns:a16="http://schemas.microsoft.com/office/drawing/2014/main" id="{8D045524-444D-FA83-054D-F8CB262606B8}"/>
-              </a:ext>
-            </a:extLst>
-          </p:cNvPr>
-          <p:cNvPicPr>
-            <a:picLocks noChangeAspect="1"/>
-          </p:cNvPicPr>
-          <p:nvPr/>
-        </p:nvPicPr>
-        <p:blipFill>
-          <a:blip r:embed="rId2"/>
-          <a:srcRect l="49387" r="28188"/>
-          <a:stretch>
-            <a:fillRect/>
-          </a:stretch>
-        </p:blipFill>
-        <p:spPr>
-          <a:xfrm>
-            <a:off x="20" y="1"/>
-            <a:ext cx="2734036" cy="6858000"/>
-          </a:xfrm>
-          <a:custGeom>
-            <a:avLst/>
-            <a:gdLst/>
-            <a:ahLst/>
-            <a:cxnLst/>
-            <a:rect l="l" t="t" r="r" b="b"/>
-            <a:pathLst>
-              <a:path w="2734056" h="6858000">
-                <a:moveTo>
-                  <a:pt x="0" y="0"/>
-                </a:moveTo>
-                <a:lnTo>
-                  <a:pt x="1674254" y="0"/>
-                </a:lnTo>
-                <a:lnTo>
-                  <a:pt x="2734056" y="6850199"/>
-                </a:lnTo>
-                <a:lnTo>
-                  <a:pt x="2734056" y="6858000"/>
-                </a:lnTo>
-                <a:lnTo>
-                  <a:pt x="461457" y="6858000"/>
-                </a:lnTo>
-                <a:lnTo>
-                  <a:pt x="0" y="4134118"/>
-                </a:lnTo>
-                <a:close/>
-              </a:path>
-            </a:pathLst>
-          </a:custGeom>
-        </p:spPr>
-      </p:pic>
-      <p:sp>
-        <p:nvSpPr>
-          <p:cNvPr id="11" name="Isosceles Triangle 10">
-            <a:extLst>
-              <a:ext uri="{FF2B5EF4-FFF2-40B4-BE49-F238E27FC236}">
-                <a16:creationId xmlns:a16="http://schemas.microsoft.com/office/drawing/2014/main" id="{051A3413-562D-435C-AAE4-56808F0CBC73}"/>
-              </a:ext>
-              <a:ext uri="{C183D7F6-B498-43B3-948B-1728B52AA6E4}">
-                <adec:decorative xmlns:adec="http://schemas.microsoft.com/office/drawing/2017/decorative" val="1"/>
-              </a:ext>
-            </a:extLst>
-          </p:cNvPr>
-          <p:cNvSpPr>
-            <a:spLocks noGrp="1" noRot="1" noChangeAspect="1" noMove="1" noResize="1" noEditPoints="1" noAdjustHandles="1" noChangeArrowheads="1" noChangeShapeType="1" noTextEdit="1"/>
-          </p:cNvSpPr>
-          <p:nvPr>
-            <p:extLst>
-              <p:ext uri="{386F3935-93C4-4BCD-93E2-E3B085C9AB24}">
-                <p16:designElem xmlns:p16="http://schemas.microsoft.com/office/powerpoint/2015/main" val="1"/>
-              </p:ext>
-            </p:extLst>
-          </p:nvPr>
-        </p:nvSpPr>
-        <p:spPr>
-          <a:xfrm>
-            <a:off x="0" y="4013201"/>
-            <a:ext cx="476655" cy="2844800"/>
-          </a:xfrm>
-          <a:prstGeom prst="triangle">
-            <a:avLst>
-              <a:gd name="adj" fmla="val 0"/>
-            </a:avLst>
-          </a:prstGeom>
-          <a:solidFill>
-            <a:schemeClr val="accent1"/>
-          </a:solidFill>
-          <a:ln>
-            <a:noFill/>
-          </a:ln>
-          <a:effectLst/>
-        </p:spPr>
-        <p:style>
-          <a:lnRef idx="1">
-            <a:schemeClr val="accent1"/>
-          </a:lnRef>
-          <a:fillRef idx="3">
-            <a:schemeClr val="accent1"/>
-          </a:fillRef>
-          <a:effectRef idx="2">
-            <a:schemeClr val="accent1"/>
-          </a:effectRef>
-          <a:fontRef idx="minor">
-            <a:schemeClr val="lt1"/>
-          </a:fontRef>
-        </p:style>
-        <p:txBody>
-          <a:bodyPr/>
-          <a:lstStyle/>
-          <a:p>
-            <a:endParaRPr lang="en-US"/>
-          </a:p>
-        </p:txBody>
-      </p:sp>
-      <p:sp>
-        <p:nvSpPr>
-          <p:cNvPr id="3" name="Content Placeholder 2">
-            <a:extLst>
-              <a:ext uri="{FF2B5EF4-FFF2-40B4-BE49-F238E27FC236}">
-                <a16:creationId xmlns:a16="http://schemas.microsoft.com/office/drawing/2014/main" id="{33CB0FA1-97A2-2E34-CBBF-B0EA6672074A}"/>
-              </a:ext>
-            </a:extLst>
-          </p:cNvPr>
-          <p:cNvSpPr>
-            <a:spLocks noGrp="1"/>
-          </p:cNvSpPr>
-          <p:nvPr>
-            <p:ph idx="1"/>
-          </p:nvPr>
-        </p:nvSpPr>
-        <p:spPr>
-          <a:xfrm>
-            <a:off x="2849562" y="2160589"/>
-            <a:ext cx="6424440" cy="3880773"/>
-          </a:xfrm>
-        </p:spPr>
-        <p:txBody>
-          <a:bodyPr>
-            <a:normAutofit/>
-          </a:bodyPr>
-          <a:lstStyle/>
-          <a:p>
-            <a:pPr>
-              <a:lnSpc>
-                <a:spcPct val="90000"/>
-              </a:lnSpc>
-            </a:pPr>
-            <a:r>
-              <a:rPr lang="en-US" dirty="0"/>
-              <a:t>Dataset Expansion, this thesis worked on ~800 articles per topic due to resource constraints.</a:t>
-            </a:r>
-            <a:endParaRPr lang="en-US"/>
-          </a:p>
-          <a:p>
-            <a:pPr>
-              <a:lnSpc>
-                <a:spcPct val="90000"/>
-              </a:lnSpc>
-            </a:pPr>
-            <a:endParaRPr lang="en-US"/>
-          </a:p>
-          <a:p>
-            <a:pPr>
-              <a:lnSpc>
-                <a:spcPct val="90000"/>
-              </a:lnSpc>
-            </a:pPr>
-            <a:r>
-              <a:rPr lang="en-US" dirty="0"/>
-              <a:t>Evaluate the model in different domains (healthcare, climate change).</a:t>
-            </a:r>
-            <a:endParaRPr lang="en-US"/>
-          </a:p>
-          <a:p>
-            <a:pPr>
-              <a:lnSpc>
-                <a:spcPct val="90000"/>
-              </a:lnSpc>
-            </a:pPr>
-            <a:endParaRPr lang="en-US"/>
-          </a:p>
-          <a:p>
-            <a:pPr>
-              <a:lnSpc>
-                <a:spcPct val="90000"/>
-              </a:lnSpc>
-            </a:pPr>
-            <a:r>
-              <a:rPr lang="en-US" dirty="0"/>
-              <a:t>Utilize a more dynamic Sentiment Scoring.</a:t>
-            </a:r>
-            <a:endParaRPr lang="en-US"/>
-          </a:p>
-          <a:p>
-            <a:pPr>
-              <a:lnSpc>
-                <a:spcPct val="90000"/>
-              </a:lnSpc>
-            </a:pPr>
-            <a:endParaRPr lang="en-US"/>
-          </a:p>
-          <a:p>
-            <a:pPr>
-              <a:lnSpc>
-                <a:spcPct val="90000"/>
-              </a:lnSpc>
-            </a:pPr>
-            <a:r>
-              <a:rPr lang="en-US" dirty="0"/>
-              <a:t>Additional Training and Evaluation of Fine-Tuning Mistral</a:t>
-            </a:r>
-            <a:endParaRPr lang="en-US"/>
-          </a:p>
-          <a:p>
-            <a:pPr>
-              <a:lnSpc>
-                <a:spcPct val="90000"/>
-              </a:lnSpc>
-            </a:pPr>
-            <a:endParaRPr lang="en-US"/>
-          </a:p>
-          <a:p>
-            <a:pPr>
-              <a:lnSpc>
-                <a:spcPct val="90000"/>
-              </a:lnSpc>
-            </a:pPr>
-            <a:r>
-              <a:rPr lang="en-US" dirty="0"/>
-              <a:t>Expand the datasets and logic for non-English corpora</a:t>
-            </a:r>
-            <a:endParaRPr lang="en-US"/>
-          </a:p>
-        </p:txBody>
-      </p:sp>
-    </p:spTree>
-    <p:extLst>
-      <p:ext uri="{BB962C8B-B14F-4D97-AF65-F5344CB8AC3E}">
-        <p14:creationId xmlns:p14="http://schemas.microsoft.com/office/powerpoint/2010/main" val="2942197101"/>
       </p:ext>
     </p:extLst>
   </p:cSld>
@@ -21834,6 +21535,386 @@
           <a:chExt cx="0" cy="0"/>
         </a:xfrm>
       </p:grpSpPr>
+      <p:sp>
+        <p:nvSpPr>
+          <p:cNvPr id="2" name="Title 1">
+            <a:extLst>
+              <a:ext uri="{FF2B5EF4-FFF2-40B4-BE49-F238E27FC236}">
+                <a16:creationId xmlns:a16="http://schemas.microsoft.com/office/drawing/2014/main" id="{8D08BC73-D9AB-6B0E-1539-76D2A001F463}"/>
+              </a:ext>
+            </a:extLst>
+          </p:cNvPr>
+          <p:cNvSpPr>
+            <a:spLocks noGrp="1"/>
+          </p:cNvSpPr>
+          <p:nvPr>
+            <p:ph type="title"/>
+          </p:nvPr>
+        </p:nvSpPr>
+        <p:spPr>
+          <a:xfrm>
+            <a:off x="2849562" y="609600"/>
+            <a:ext cx="6424440" cy="1320800"/>
+          </a:xfrm>
+        </p:spPr>
+        <p:txBody>
+          <a:bodyPr>
+            <a:normAutofit/>
+          </a:bodyPr>
+          <a:lstStyle/>
+          <a:p>
+            <a:r>
+              <a:rPr lang="en-US" dirty="0"/>
+              <a:t>Future Work</a:t>
+            </a:r>
+          </a:p>
+        </p:txBody>
+      </p:sp>
+      <p:sp>
+        <p:nvSpPr>
+          <p:cNvPr id="9" name="Isosceles Triangle 8">
+            <a:extLst>
+              <a:ext uri="{FF2B5EF4-FFF2-40B4-BE49-F238E27FC236}">
+                <a16:creationId xmlns:a16="http://schemas.microsoft.com/office/drawing/2014/main" id="{9F8803AC-EE0E-40C2-AD46-FD84FAD82220}"/>
+              </a:ext>
+              <a:ext uri="{C183D7F6-B498-43B3-948B-1728B52AA6E4}">
+                <adec:decorative xmlns:adec="http://schemas.microsoft.com/office/drawing/2017/decorative" val="1"/>
+              </a:ext>
+            </a:extLst>
+          </p:cNvPr>
+          <p:cNvSpPr>
+            <a:spLocks noGrp="1" noRot="1" noChangeAspect="1" noMove="1" noResize="1" noEditPoints="1" noAdjustHandles="1" noChangeArrowheads="1" noChangeShapeType="1" noTextEdit="1"/>
+          </p:cNvSpPr>
+          <p:nvPr>
+            <p:extLst>
+              <p:ext uri="{386F3935-93C4-4BCD-93E2-E3B085C9AB24}">
+                <p16:designElem xmlns:p16="http://schemas.microsoft.com/office/powerpoint/2015/main" val="1"/>
+              </p:ext>
+            </p:extLst>
+          </p:nvPr>
+        </p:nvSpPr>
+        <p:spPr>
+          <a:xfrm>
+            <a:off x="870916" y="3822970"/>
+            <a:ext cx="496112" cy="2918298"/>
+          </a:xfrm>
+          <a:prstGeom prst="triangle">
+            <a:avLst>
+              <a:gd name="adj" fmla="val 0"/>
+            </a:avLst>
+          </a:prstGeom>
+          <a:solidFill>
+            <a:schemeClr val="accent1">
+              <a:alpha val="85000"/>
+            </a:schemeClr>
+          </a:solidFill>
+          <a:ln>
+            <a:noFill/>
+          </a:ln>
+          <a:effectLst/>
+        </p:spPr>
+        <p:style>
+          <a:lnRef idx="1">
+            <a:schemeClr val="accent1"/>
+          </a:lnRef>
+          <a:fillRef idx="3">
+            <a:schemeClr val="accent1"/>
+          </a:fillRef>
+          <a:effectRef idx="2">
+            <a:schemeClr val="accent1"/>
+          </a:effectRef>
+          <a:fontRef idx="minor">
+            <a:schemeClr val="lt1"/>
+          </a:fontRef>
+        </p:style>
+        <p:txBody>
+          <a:bodyPr/>
+          <a:lstStyle/>
+          <a:p>
+            <a:endParaRPr lang="en-US"/>
+          </a:p>
+        </p:txBody>
+      </p:sp>
+      <p:pic>
+        <p:nvPicPr>
+          <p:cNvPr id="5" name="Picture 4" descr="Digital financial graph">
+            <a:extLst>
+              <a:ext uri="{FF2B5EF4-FFF2-40B4-BE49-F238E27FC236}">
+                <a16:creationId xmlns:a16="http://schemas.microsoft.com/office/drawing/2014/main" id="{8D045524-444D-FA83-054D-F8CB262606B8}"/>
+              </a:ext>
+            </a:extLst>
+          </p:cNvPr>
+          <p:cNvPicPr>
+            <a:picLocks noChangeAspect="1"/>
+          </p:cNvPicPr>
+          <p:nvPr/>
+        </p:nvPicPr>
+        <p:blipFill>
+          <a:blip r:embed="rId2"/>
+          <a:srcRect l="49387" r="28188"/>
+          <a:stretch>
+            <a:fillRect/>
+          </a:stretch>
+        </p:blipFill>
+        <p:spPr>
+          <a:xfrm>
+            <a:off x="20" y="1"/>
+            <a:ext cx="2734036" cy="6858000"/>
+          </a:xfrm>
+          <a:custGeom>
+            <a:avLst/>
+            <a:gdLst/>
+            <a:ahLst/>
+            <a:cxnLst/>
+            <a:rect l="l" t="t" r="r" b="b"/>
+            <a:pathLst>
+              <a:path w="2734056" h="6858000">
+                <a:moveTo>
+                  <a:pt x="0" y="0"/>
+                </a:moveTo>
+                <a:lnTo>
+                  <a:pt x="1674254" y="0"/>
+                </a:lnTo>
+                <a:lnTo>
+                  <a:pt x="2734056" y="6850199"/>
+                </a:lnTo>
+                <a:lnTo>
+                  <a:pt x="2734056" y="6858000"/>
+                </a:lnTo>
+                <a:lnTo>
+                  <a:pt x="461457" y="6858000"/>
+                </a:lnTo>
+                <a:lnTo>
+                  <a:pt x="0" y="4134118"/>
+                </a:lnTo>
+                <a:close/>
+              </a:path>
+            </a:pathLst>
+          </a:custGeom>
+        </p:spPr>
+      </p:pic>
+      <p:sp>
+        <p:nvSpPr>
+          <p:cNvPr id="11" name="Isosceles Triangle 10">
+            <a:extLst>
+              <a:ext uri="{FF2B5EF4-FFF2-40B4-BE49-F238E27FC236}">
+                <a16:creationId xmlns:a16="http://schemas.microsoft.com/office/drawing/2014/main" id="{051A3413-562D-435C-AAE4-56808F0CBC73}"/>
+              </a:ext>
+              <a:ext uri="{C183D7F6-B498-43B3-948B-1728B52AA6E4}">
+                <adec:decorative xmlns:adec="http://schemas.microsoft.com/office/drawing/2017/decorative" val="1"/>
+              </a:ext>
+            </a:extLst>
+          </p:cNvPr>
+          <p:cNvSpPr>
+            <a:spLocks noGrp="1" noRot="1" noChangeAspect="1" noMove="1" noResize="1" noEditPoints="1" noAdjustHandles="1" noChangeArrowheads="1" noChangeShapeType="1" noTextEdit="1"/>
+          </p:cNvSpPr>
+          <p:nvPr>
+            <p:extLst>
+              <p:ext uri="{386F3935-93C4-4BCD-93E2-E3B085C9AB24}">
+                <p16:designElem xmlns:p16="http://schemas.microsoft.com/office/powerpoint/2015/main" val="1"/>
+              </p:ext>
+            </p:extLst>
+          </p:nvPr>
+        </p:nvSpPr>
+        <p:spPr>
+          <a:xfrm>
+            <a:off x="0" y="4013201"/>
+            <a:ext cx="476655" cy="2844800"/>
+          </a:xfrm>
+          <a:prstGeom prst="triangle">
+            <a:avLst>
+              <a:gd name="adj" fmla="val 0"/>
+            </a:avLst>
+          </a:prstGeom>
+          <a:solidFill>
+            <a:schemeClr val="accent1"/>
+          </a:solidFill>
+          <a:ln>
+            <a:noFill/>
+          </a:ln>
+          <a:effectLst/>
+        </p:spPr>
+        <p:style>
+          <a:lnRef idx="1">
+            <a:schemeClr val="accent1"/>
+          </a:lnRef>
+          <a:fillRef idx="3">
+            <a:schemeClr val="accent1"/>
+          </a:fillRef>
+          <a:effectRef idx="2">
+            <a:schemeClr val="accent1"/>
+          </a:effectRef>
+          <a:fontRef idx="minor">
+            <a:schemeClr val="lt1"/>
+          </a:fontRef>
+        </p:style>
+        <p:txBody>
+          <a:bodyPr/>
+          <a:lstStyle/>
+          <a:p>
+            <a:endParaRPr lang="en-US"/>
+          </a:p>
+        </p:txBody>
+      </p:sp>
+      <p:sp>
+        <p:nvSpPr>
+          <p:cNvPr id="3" name="Content Placeholder 2">
+            <a:extLst>
+              <a:ext uri="{FF2B5EF4-FFF2-40B4-BE49-F238E27FC236}">
+                <a16:creationId xmlns:a16="http://schemas.microsoft.com/office/drawing/2014/main" id="{33CB0FA1-97A2-2E34-CBBF-B0EA6672074A}"/>
+              </a:ext>
+            </a:extLst>
+          </p:cNvPr>
+          <p:cNvSpPr>
+            <a:spLocks noGrp="1"/>
+          </p:cNvSpPr>
+          <p:nvPr>
+            <p:ph idx="1"/>
+          </p:nvPr>
+        </p:nvSpPr>
+        <p:spPr>
+          <a:xfrm>
+            <a:off x="2849562" y="2160589"/>
+            <a:ext cx="6424440" cy="3880773"/>
+          </a:xfrm>
+        </p:spPr>
+        <p:txBody>
+          <a:bodyPr>
+            <a:normAutofit/>
+          </a:bodyPr>
+          <a:lstStyle/>
+          <a:p>
+            <a:pPr>
+              <a:lnSpc>
+                <a:spcPct val="90000"/>
+              </a:lnSpc>
+            </a:pPr>
+            <a:r>
+              <a:rPr lang="en-US" dirty="0"/>
+              <a:t>Dataset Expansion, this thesis worked on ~800 articles per topic due to resource constraints.</a:t>
+            </a:r>
+            <a:endParaRPr lang="en-US"/>
+          </a:p>
+          <a:p>
+            <a:pPr>
+              <a:lnSpc>
+                <a:spcPct val="90000"/>
+              </a:lnSpc>
+            </a:pPr>
+            <a:endParaRPr lang="en-US"/>
+          </a:p>
+          <a:p>
+            <a:pPr>
+              <a:lnSpc>
+                <a:spcPct val="90000"/>
+              </a:lnSpc>
+            </a:pPr>
+            <a:r>
+              <a:rPr lang="en-US" dirty="0"/>
+              <a:t>Evaluate the model in different domains (healthcare, climate change).</a:t>
+            </a:r>
+            <a:endParaRPr lang="en-US"/>
+          </a:p>
+          <a:p>
+            <a:pPr>
+              <a:lnSpc>
+                <a:spcPct val="90000"/>
+              </a:lnSpc>
+            </a:pPr>
+            <a:endParaRPr lang="en-US"/>
+          </a:p>
+          <a:p>
+            <a:pPr>
+              <a:lnSpc>
+                <a:spcPct val="90000"/>
+              </a:lnSpc>
+            </a:pPr>
+            <a:r>
+              <a:rPr lang="en-US" dirty="0"/>
+              <a:t>Utilize a more dynamic Sentiment Scoring.</a:t>
+            </a:r>
+            <a:endParaRPr lang="en-US"/>
+          </a:p>
+          <a:p>
+            <a:pPr>
+              <a:lnSpc>
+                <a:spcPct val="90000"/>
+              </a:lnSpc>
+            </a:pPr>
+            <a:endParaRPr lang="en-US"/>
+          </a:p>
+          <a:p>
+            <a:pPr>
+              <a:lnSpc>
+                <a:spcPct val="90000"/>
+              </a:lnSpc>
+            </a:pPr>
+            <a:r>
+              <a:rPr lang="en-US" dirty="0"/>
+              <a:t>Additional Training and Evaluation of Fine-Tuning Mistral</a:t>
+            </a:r>
+            <a:endParaRPr lang="en-US"/>
+          </a:p>
+          <a:p>
+            <a:pPr>
+              <a:lnSpc>
+                <a:spcPct val="90000"/>
+              </a:lnSpc>
+            </a:pPr>
+            <a:endParaRPr lang="en-US"/>
+          </a:p>
+          <a:p>
+            <a:pPr>
+              <a:lnSpc>
+                <a:spcPct val="90000"/>
+              </a:lnSpc>
+            </a:pPr>
+            <a:r>
+              <a:rPr lang="en-US" dirty="0"/>
+              <a:t>Expand the datasets and logic for non-English corpora</a:t>
+            </a:r>
+            <a:endParaRPr lang="en-US"/>
+          </a:p>
+        </p:txBody>
+      </p:sp>
+    </p:spTree>
+    <p:extLst>
+      <p:ext uri="{BB962C8B-B14F-4D97-AF65-F5344CB8AC3E}">
+        <p14:creationId xmlns:p14="http://schemas.microsoft.com/office/powerpoint/2010/main" val="2942197101"/>
+      </p:ext>
+    </p:extLst>
+  </p:cSld>
+  <p:clrMapOvr>
+    <a:masterClrMapping/>
+  </p:clrMapOvr>
+</p:sld>
+</file>
+
+<file path=ppt/slides/slide31.xml><?xml version="1.0" encoding="utf-8"?>
+<p:sld xmlns:a="http://schemas.openxmlformats.org/drawingml/2006/main" xmlns:r="http://schemas.openxmlformats.org/officeDocument/2006/relationships" xmlns:p="http://schemas.openxmlformats.org/presentationml/2006/main">
+  <p:cSld>
+    <p:bg>
+      <p:bgPr>
+        <a:solidFill>
+          <a:schemeClr val="bg1"/>
+        </a:solidFill>
+        <a:effectLst/>
+      </p:bgPr>
+    </p:bg>
+    <p:spTree>
+      <p:nvGrpSpPr>
+        <p:cNvPr id="1" name=""/>
+        <p:cNvGrpSpPr/>
+        <p:nvPr/>
+      </p:nvGrpSpPr>
+      <p:grpSpPr>
+        <a:xfrm>
+          <a:off x="0" y="0"/>
+          <a:ext cx="0" cy="0"/>
+          <a:chOff x="0" y="0"/>
+          <a:chExt cx="0" cy="0"/>
+        </a:xfrm>
+      </p:grpSpPr>
       <p:grpSp>
         <p:nvGrpSpPr>
           <p:cNvPr id="18" name="Group 17">
@@ -22756,7 +22837,7 @@
 </p:sld>
 </file>
 
-<file path=ppt/slides/slide31.xml><?xml version="1.0" encoding="utf-8"?>
+<file path=ppt/slides/slide32.xml><?xml version="1.0" encoding="utf-8"?>
 <p:sld xmlns:a="http://schemas.openxmlformats.org/drawingml/2006/main" xmlns:r="http://schemas.openxmlformats.org/officeDocument/2006/relationships" xmlns:p="http://schemas.openxmlformats.org/presentationml/2006/main">
   <p:cSld>
     <p:spTree>
@@ -22822,7 +22903,7 @@
           <a:bodyPr/>
           <a:lstStyle/>
           <a:p>
-            <a:endParaRPr lang="en-US"/>
+            <a:endParaRPr lang="en-US" dirty="0"/>
           </a:p>
         </p:txBody>
       </p:sp>
@@ -22877,7 +22958,10 @@
           <a:bodyPr/>
           <a:lstStyle/>
           <a:p>
-            <a:endParaRPr lang="en-US" dirty="0"/>
+            <a:r>
+              <a:rPr lang="en-US" dirty="0"/>
+              <a:t>Real World impact of Polarization</a:t>
+            </a:r>
           </a:p>
         </p:txBody>
       </p:sp>
@@ -22906,6 +22990,147 @@
           </a:p>
         </p:txBody>
       </p:sp>
+      <p:pic>
+        <p:nvPicPr>
+          <p:cNvPr id="1028" name="Picture 4" descr="Algerian Boxer Imane Khelif Wins Olympic Gold After Gender Uproar">
+            <a:extLst>
+              <a:ext uri="{FF2B5EF4-FFF2-40B4-BE49-F238E27FC236}">
+                <a16:creationId xmlns:a16="http://schemas.microsoft.com/office/drawing/2014/main" id="{DDA39497-601C-0A5B-2F75-7434E8E06F22}"/>
+              </a:ext>
+            </a:extLst>
+          </p:cNvPr>
+          <p:cNvPicPr>
+            <a:picLocks noChangeAspect="1" noChangeArrowheads="1"/>
+          </p:cNvPicPr>
+          <p:nvPr/>
+        </p:nvPicPr>
+        <p:blipFill>
+          <a:blip r:embed="rId2">
+            <a:extLst>
+              <a:ext uri="{28A0092B-C50C-407E-A947-70E740481C1C}">
+                <a14:useLocalDpi xmlns:a14="http://schemas.microsoft.com/office/drawing/2010/main" val="0"/>
+              </a:ext>
+            </a:extLst>
+          </a:blip>
+          <a:srcRect/>
+          <a:stretch>
+            <a:fillRect/>
+          </a:stretch>
+        </p:blipFill>
+        <p:spPr bwMode="auto">
+          <a:xfrm>
+            <a:off x="952500" y="2965822"/>
+            <a:ext cx="5838265" cy="3892177"/>
+          </a:xfrm>
+          <a:prstGeom prst="rect">
+            <a:avLst/>
+          </a:prstGeom>
+          <a:noFill/>
+          <a:extLst>
+            <a:ext uri="{909E8E84-426E-40DD-AFC4-6F175D3DCCD1}">
+              <a14:hiddenFill xmlns:a14="http://schemas.microsoft.com/office/drawing/2010/main">
+                <a:solidFill>
+                  <a:srgbClr val="FFFFFF"/>
+                </a:solidFill>
+              </a14:hiddenFill>
+            </a:ext>
+          </a:extLst>
+        </p:spPr>
+      </p:pic>
+      <p:pic>
+        <p:nvPicPr>
+          <p:cNvPr id="1030" name="Picture 6" descr="United Kingdom Sales Strategies Post-Brexit | Allego">
+            <a:extLst>
+              <a:ext uri="{FF2B5EF4-FFF2-40B4-BE49-F238E27FC236}">
+                <a16:creationId xmlns:a16="http://schemas.microsoft.com/office/drawing/2014/main" id="{8204503C-BCA5-BC7B-BEED-07CA0397BDD9}"/>
+              </a:ext>
+            </a:extLst>
+          </p:cNvPr>
+          <p:cNvPicPr>
+            <a:picLocks noChangeAspect="1" noChangeArrowheads="1"/>
+          </p:cNvPicPr>
+          <p:nvPr/>
+        </p:nvPicPr>
+        <p:blipFill>
+          <a:blip r:embed="rId3">
+            <a:extLst>
+              <a:ext uri="{28A0092B-C50C-407E-A947-70E740481C1C}">
+                <a14:useLocalDpi xmlns:a14="http://schemas.microsoft.com/office/drawing/2010/main" val="0"/>
+              </a:ext>
+            </a:extLst>
+          </a:blip>
+          <a:srcRect/>
+          <a:stretch>
+            <a:fillRect/>
+          </a:stretch>
+        </p:blipFill>
+        <p:spPr bwMode="auto">
+          <a:xfrm>
+            <a:off x="577103" y="-512686"/>
+            <a:ext cx="8073452" cy="4541317"/>
+          </a:xfrm>
+          <a:prstGeom prst="rect">
+            <a:avLst/>
+          </a:prstGeom>
+          <a:noFill/>
+          <a:extLst>
+            <a:ext uri="{909E8E84-426E-40DD-AFC4-6F175D3DCCD1}">
+              <a14:hiddenFill xmlns:a14="http://schemas.microsoft.com/office/drawing/2010/main">
+                <a:solidFill>
+                  <a:srgbClr val="FFFFFF"/>
+                </a:solidFill>
+              </a14:hiddenFill>
+            </a:ext>
+          </a:extLst>
+        </p:spPr>
+      </p:pic>
+      <p:pic>
+        <p:nvPicPr>
+          <p:cNvPr id="1032" name="Picture 8" descr="Cut out of Joe Biden and Donald Trump facing each other with shape of donkey and elephant head in background.">
+            <a:extLst>
+              <a:ext uri="{FF2B5EF4-FFF2-40B4-BE49-F238E27FC236}">
+                <a16:creationId xmlns:a16="http://schemas.microsoft.com/office/drawing/2014/main" id="{6178AAB8-AE21-5122-B732-EFCAE69367CD}"/>
+              </a:ext>
+            </a:extLst>
+          </p:cNvPr>
+          <p:cNvPicPr>
+            <a:picLocks noChangeAspect="1" noChangeArrowheads="1"/>
+          </p:cNvPicPr>
+          <p:nvPr/>
+        </p:nvPicPr>
+        <p:blipFill>
+          <a:blip r:embed="rId4">
+            <a:extLst>
+              <a:ext uri="{28A0092B-C50C-407E-A947-70E740481C1C}">
+                <a14:useLocalDpi xmlns:a14="http://schemas.microsoft.com/office/drawing/2010/main" val="0"/>
+              </a:ext>
+            </a:extLst>
+          </a:blip>
+          <a:srcRect/>
+          <a:stretch>
+            <a:fillRect/>
+          </a:stretch>
+        </p:blipFill>
+        <p:spPr bwMode="auto">
+          <a:xfrm>
+            <a:off x="3927109" y="2238374"/>
+            <a:ext cx="8210550" cy="4619625"/>
+          </a:xfrm>
+          <a:prstGeom prst="rect">
+            <a:avLst/>
+          </a:prstGeom>
+          <a:noFill/>
+          <a:extLst>
+            <a:ext uri="{909E8E84-426E-40DD-AFC4-6F175D3DCCD1}">
+              <a14:hiddenFill xmlns:a14="http://schemas.microsoft.com/office/drawing/2010/main">
+                <a:solidFill>
+                  <a:srgbClr val="FFFFFF"/>
+                </a:solidFill>
+              </a14:hiddenFill>
+            </a:ext>
+          </a:extLst>
+        </p:spPr>
+      </p:pic>
     </p:spTree>
     <p:extLst>
       <p:ext uri="{BB962C8B-B14F-4D97-AF65-F5344CB8AC3E}">
@@ -23017,6 +23242,590 @@
 </file>
 
 <file path=ppt/slides/slide6.xml><?xml version="1.0" encoding="utf-8"?>
+<p:sld xmlns:a="http://schemas.openxmlformats.org/drawingml/2006/main" xmlns:r="http://schemas.openxmlformats.org/officeDocument/2006/relationships" xmlns:p="http://schemas.openxmlformats.org/presentationml/2006/main">
+  <p:cSld>
+    <p:spTree>
+      <p:nvGrpSpPr>
+        <p:cNvPr id="1" name=""/>
+        <p:cNvGrpSpPr/>
+        <p:nvPr/>
+      </p:nvGrpSpPr>
+      <p:grpSpPr>
+        <a:xfrm>
+          <a:off x="0" y="0"/>
+          <a:ext cx="0" cy="0"/>
+          <a:chOff x="0" y="0"/>
+          <a:chExt cx="0" cy="0"/>
+        </a:xfrm>
+      </p:grpSpPr>
+      <p:sp>
+        <p:nvSpPr>
+          <p:cNvPr id="2" name="Title 1">
+            <a:extLst>
+              <a:ext uri="{FF2B5EF4-FFF2-40B4-BE49-F238E27FC236}">
+                <a16:creationId xmlns:a16="http://schemas.microsoft.com/office/drawing/2014/main" id="{F30F5275-3DDF-5872-B175-DE65F33DF9E3}"/>
+              </a:ext>
+            </a:extLst>
+          </p:cNvPr>
+          <p:cNvSpPr>
+            <a:spLocks noGrp="1"/>
+          </p:cNvSpPr>
+          <p:nvPr>
+            <p:ph type="title"/>
+          </p:nvPr>
+        </p:nvSpPr>
+        <p:spPr/>
+        <p:txBody>
+          <a:bodyPr/>
+          <a:lstStyle/>
+          <a:p>
+            <a:r>
+              <a:rPr lang="en-US" dirty="0"/>
+              <a:t>POLAR Limitations</a:t>
+            </a:r>
+          </a:p>
+        </p:txBody>
+      </p:sp>
+      <p:sp>
+        <p:nvSpPr>
+          <p:cNvPr id="3" name="Content Placeholder 2">
+            <a:extLst>
+              <a:ext uri="{FF2B5EF4-FFF2-40B4-BE49-F238E27FC236}">
+                <a16:creationId xmlns:a16="http://schemas.microsoft.com/office/drawing/2014/main" id="{92F4ACB6-3862-D499-9FB7-3D0D9B93BA9F}"/>
+              </a:ext>
+            </a:extLst>
+          </p:cNvPr>
+          <p:cNvSpPr>
+            <a:spLocks noGrp="1"/>
+          </p:cNvSpPr>
+          <p:nvPr>
+            <p:ph idx="1"/>
+          </p:nvPr>
+        </p:nvSpPr>
+        <p:spPr/>
+        <p:txBody>
+          <a:bodyPr/>
+          <a:lstStyle/>
+          <a:p>
+            <a:endParaRPr lang="en-US"/>
+          </a:p>
+        </p:txBody>
+      </p:sp>
+    </p:spTree>
+    <p:extLst>
+      <p:ext uri="{BB962C8B-B14F-4D97-AF65-F5344CB8AC3E}">
+        <p14:creationId xmlns:p14="http://schemas.microsoft.com/office/powerpoint/2010/main" val="620135698"/>
+      </p:ext>
+    </p:extLst>
+  </p:cSld>
+  <p:clrMapOvr>
+    <a:masterClrMapping/>
+  </p:clrMapOvr>
+</p:sld>
+</file>
+
+<file path=ppt/slides/slide7.xml><?xml version="1.0" encoding="utf-8"?>
+<p:sld xmlns:a="http://schemas.openxmlformats.org/drawingml/2006/main" xmlns:r="http://schemas.openxmlformats.org/officeDocument/2006/relationships" xmlns:p="http://schemas.openxmlformats.org/presentationml/2006/main">
+  <p:cSld>
+    <p:bg>
+      <p:bgPr>
+        <a:solidFill>
+          <a:schemeClr val="bg1"/>
+        </a:solidFill>
+        <a:effectLst/>
+      </p:bgPr>
+    </p:bg>
+    <p:spTree>
+      <p:nvGrpSpPr>
+        <p:cNvPr id="1" name=""/>
+        <p:cNvGrpSpPr/>
+        <p:nvPr/>
+      </p:nvGrpSpPr>
+      <p:grpSpPr>
+        <a:xfrm>
+          <a:off x="0" y="0"/>
+          <a:ext cx="0" cy="0"/>
+          <a:chOff x="0" y="0"/>
+          <a:chExt cx="0" cy="0"/>
+        </a:xfrm>
+      </p:grpSpPr>
+      <p:sp useBgFill="1">
+        <p:nvSpPr>
+          <p:cNvPr id="9" name="Rectangle 8">
+            <a:extLst>
+              <a:ext uri="{FF2B5EF4-FFF2-40B4-BE49-F238E27FC236}">
+                <a16:creationId xmlns:a16="http://schemas.microsoft.com/office/drawing/2014/main" id="{9F4444CE-BC8D-4D61-B303-4C05614E62AB}"/>
+              </a:ext>
+              <a:ext uri="{C183D7F6-B498-43B3-948B-1728B52AA6E4}">
+                <adec:decorative xmlns:adec="http://schemas.microsoft.com/office/drawing/2017/decorative" val="1"/>
+              </a:ext>
+            </a:extLst>
+          </p:cNvPr>
+          <p:cNvSpPr>
+            <a:spLocks noGrp="1" noRot="1" noChangeAspect="1" noMove="1" noResize="1" noEditPoints="1" noAdjustHandles="1" noChangeArrowheads="1" noChangeShapeType="1" noTextEdit="1"/>
+          </p:cNvSpPr>
+          <p:nvPr>
+            <p:extLst>
+              <p:ext uri="{386F3935-93C4-4BCD-93E2-E3B085C9AB24}">
+                <p16:designElem xmlns:p16="http://schemas.microsoft.com/office/powerpoint/2015/main" val="1"/>
+              </p:ext>
+            </p:extLst>
+          </p:nvPr>
+        </p:nvSpPr>
+        <p:spPr>
+          <a:xfrm>
+            <a:off x="0" y="0"/>
+            <a:ext cx="12192000" cy="6858000"/>
+          </a:xfrm>
+          <a:prstGeom prst="rect">
+            <a:avLst/>
+          </a:prstGeom>
+          <a:ln>
+            <a:noFill/>
+          </a:ln>
+        </p:spPr>
+        <p:style>
+          <a:lnRef idx="2">
+            <a:schemeClr val="accent1">
+              <a:shade val="50000"/>
+            </a:schemeClr>
+          </a:lnRef>
+          <a:fillRef idx="1">
+            <a:schemeClr val="accent1"/>
+          </a:fillRef>
+          <a:effectRef idx="0">
+            <a:schemeClr val="accent1"/>
+          </a:effectRef>
+          <a:fontRef idx="minor">
+            <a:schemeClr val="lt1"/>
+          </a:fontRef>
+        </p:style>
+        <p:txBody>
+          <a:bodyPr rtlCol="0" anchor="ctr"/>
+          <a:lstStyle/>
+          <a:p>
+            <a:pPr algn="ctr"/>
+            <a:endParaRPr lang="en-US"/>
+          </a:p>
+        </p:txBody>
+      </p:sp>
+      <p:sp>
+        <p:nvSpPr>
+          <p:cNvPr id="11" name="Rectangle 10">
+            <a:extLst>
+              <a:ext uri="{FF2B5EF4-FFF2-40B4-BE49-F238E27FC236}">
+                <a16:creationId xmlns:a16="http://schemas.microsoft.com/office/drawing/2014/main" id="{62423CA5-E2E1-4789-B759-9906C1C94063}"/>
+              </a:ext>
+              <a:ext uri="{C183D7F6-B498-43B3-948B-1728B52AA6E4}">
+                <adec:decorative xmlns:adec="http://schemas.microsoft.com/office/drawing/2017/decorative" val="1"/>
+              </a:ext>
+            </a:extLst>
+          </p:cNvPr>
+          <p:cNvSpPr>
+            <a:spLocks noGrp="1" noRot="1" noChangeAspect="1" noMove="1" noResize="1" noEditPoints="1" noAdjustHandles="1" noChangeArrowheads="1" noChangeShapeType="1" noTextEdit="1"/>
+          </p:cNvSpPr>
+          <p:nvPr>
+            <p:extLst>
+              <p:ext uri="{386F3935-93C4-4BCD-93E2-E3B085C9AB24}">
+                <p16:designElem xmlns:p16="http://schemas.microsoft.com/office/powerpoint/2015/main" val="1"/>
+              </p:ext>
+            </p:extLst>
+          </p:nvPr>
+        </p:nvSpPr>
+        <p:spPr>
+          <a:xfrm>
+            <a:off x="0" y="-3"/>
+            <a:ext cx="4660126" cy="6858000"/>
+          </a:xfrm>
+          <a:prstGeom prst="rect">
+            <a:avLst/>
+          </a:prstGeom>
+          <a:solidFill>
+            <a:schemeClr val="tx2"/>
+          </a:solidFill>
+          <a:ln>
+            <a:noFill/>
+          </a:ln>
+          <a:effectLst/>
+        </p:spPr>
+        <p:style>
+          <a:lnRef idx="1">
+            <a:schemeClr val="accent1"/>
+          </a:lnRef>
+          <a:fillRef idx="3">
+            <a:schemeClr val="accent1"/>
+          </a:fillRef>
+          <a:effectRef idx="2">
+            <a:schemeClr val="accent1"/>
+          </a:effectRef>
+          <a:fontRef idx="minor">
+            <a:schemeClr val="lt1"/>
+          </a:fontRef>
+        </p:style>
+        <p:txBody>
+          <a:bodyPr/>
+          <a:lstStyle/>
+          <a:p>
+            <a:endParaRPr lang="en-US"/>
+          </a:p>
+        </p:txBody>
+      </p:sp>
+      <p:sp>
+        <p:nvSpPr>
+          <p:cNvPr id="13" name="Isosceles Triangle 12">
+            <a:extLst>
+              <a:ext uri="{FF2B5EF4-FFF2-40B4-BE49-F238E27FC236}">
+                <a16:creationId xmlns:a16="http://schemas.microsoft.com/office/drawing/2014/main" id="{73772B81-181F-48B7-8826-4D9686D15DF5}"/>
+              </a:ext>
+              <a:ext uri="{C183D7F6-B498-43B3-948B-1728B52AA6E4}">
+                <adec:decorative xmlns:adec="http://schemas.microsoft.com/office/drawing/2017/decorative" val="1"/>
+              </a:ext>
+            </a:extLst>
+          </p:cNvPr>
+          <p:cNvSpPr>
+            <a:spLocks noGrp="1" noRot="1" noChangeAspect="1" noMove="1" noResize="1" noEditPoints="1" noAdjustHandles="1" noChangeArrowheads="1" noChangeShapeType="1" noTextEdit="1"/>
+          </p:cNvSpPr>
+          <p:nvPr>
+            <p:extLst>
+              <p:ext uri="{386F3935-93C4-4BCD-93E2-E3B085C9AB24}">
+                <p16:designElem xmlns:p16="http://schemas.microsoft.com/office/powerpoint/2015/main" val="1"/>
+              </p:ext>
+            </p:extLst>
+          </p:nvPr>
+        </p:nvSpPr>
+        <p:spPr>
+          <a:xfrm rot="10800000">
+            <a:off x="4660127" y="-3"/>
+            <a:ext cx="1056745" cy="6858001"/>
+          </a:xfrm>
+          <a:prstGeom prst="triangle">
+            <a:avLst>
+              <a:gd name="adj" fmla="val 100000"/>
+            </a:avLst>
+          </a:prstGeom>
+          <a:solidFill>
+            <a:schemeClr val="tx2"/>
+          </a:solidFill>
+          <a:ln>
+            <a:noFill/>
+          </a:ln>
+          <a:effectLst/>
+        </p:spPr>
+        <p:style>
+          <a:lnRef idx="1">
+            <a:schemeClr val="accent1"/>
+          </a:lnRef>
+          <a:fillRef idx="3">
+            <a:schemeClr val="accent1"/>
+          </a:fillRef>
+          <a:effectRef idx="2">
+            <a:schemeClr val="accent1"/>
+          </a:effectRef>
+          <a:fontRef idx="minor">
+            <a:schemeClr val="lt1"/>
+          </a:fontRef>
+        </p:style>
+        <p:txBody>
+          <a:bodyPr/>
+          <a:lstStyle/>
+          <a:p>
+            <a:endParaRPr lang="en-US" dirty="0"/>
+          </a:p>
+        </p:txBody>
+      </p:sp>
+      <p:sp>
+        <p:nvSpPr>
+          <p:cNvPr id="2" name="Title 1">
+            <a:extLst>
+              <a:ext uri="{FF2B5EF4-FFF2-40B4-BE49-F238E27FC236}">
+                <a16:creationId xmlns:a16="http://schemas.microsoft.com/office/drawing/2014/main" id="{16167624-3D20-980D-ABF6-0F2D1EABF3A4}"/>
+              </a:ext>
+            </a:extLst>
+          </p:cNvPr>
+          <p:cNvSpPr>
+            <a:spLocks noGrp="1"/>
+          </p:cNvSpPr>
+          <p:nvPr>
+            <p:ph type="title"/>
+          </p:nvPr>
+        </p:nvSpPr>
+        <p:spPr>
+          <a:xfrm>
+            <a:off x="673754" y="643467"/>
+            <a:ext cx="4203045" cy="1375608"/>
+          </a:xfrm>
+        </p:spPr>
+        <p:txBody>
+          <a:bodyPr anchor="ctr">
+            <a:normAutofit/>
+          </a:bodyPr>
+          <a:lstStyle/>
+          <a:p>
+            <a:r>
+              <a:rPr lang="en-US">
+                <a:solidFill>
+                  <a:schemeClr val="bg1"/>
+                </a:solidFill>
+              </a:rPr>
+              <a:t>Objectives</a:t>
+            </a:r>
+          </a:p>
+        </p:txBody>
+      </p:sp>
+      <p:sp>
+        <p:nvSpPr>
+          <p:cNvPr id="3" name="Content Placeholder 2">
+            <a:extLst>
+              <a:ext uri="{FF2B5EF4-FFF2-40B4-BE49-F238E27FC236}">
+                <a16:creationId xmlns:a16="http://schemas.microsoft.com/office/drawing/2014/main" id="{8BF9DB96-FB40-24D7-E66B-8730DE1DA949}"/>
+              </a:ext>
+            </a:extLst>
+          </p:cNvPr>
+          <p:cNvSpPr>
+            <a:spLocks noGrp="1"/>
+          </p:cNvSpPr>
+          <p:nvPr>
+            <p:ph idx="1"/>
+          </p:nvPr>
+        </p:nvSpPr>
+        <p:spPr>
+          <a:xfrm>
+            <a:off x="673754" y="2160590"/>
+            <a:ext cx="3973943" cy="3440110"/>
+          </a:xfrm>
+        </p:spPr>
+        <p:txBody>
+          <a:bodyPr>
+            <a:normAutofit/>
+          </a:bodyPr>
+          <a:lstStyle/>
+          <a:p>
+            <a:pPr>
+              <a:lnSpc>
+                <a:spcPct val="90000"/>
+              </a:lnSpc>
+            </a:pPr>
+            <a:r>
+              <a:rPr lang="en-US" sz="1700" dirty="0">
+                <a:solidFill>
+                  <a:schemeClr val="bg1"/>
+                </a:solidFill>
+              </a:rPr>
+              <a:t>Address the limitations of the POLAR Pipeline</a:t>
+            </a:r>
+          </a:p>
+          <a:p>
+            <a:pPr>
+              <a:lnSpc>
+                <a:spcPct val="90000"/>
+              </a:lnSpc>
+            </a:pPr>
+            <a:endParaRPr lang="en-US" sz="1700" dirty="0">
+              <a:solidFill>
+                <a:schemeClr val="bg1"/>
+              </a:solidFill>
+            </a:endParaRPr>
+          </a:p>
+          <a:p>
+            <a:pPr>
+              <a:lnSpc>
+                <a:spcPct val="90000"/>
+              </a:lnSpc>
+            </a:pPr>
+            <a:r>
+              <a:rPr lang="en-US" sz="1700" dirty="0">
+                <a:solidFill>
+                  <a:schemeClr val="bg1"/>
+                </a:solidFill>
+              </a:rPr>
+              <a:t>Integrate LLMs into the POLAR Pipeline for Attitude Detection</a:t>
+            </a:r>
+          </a:p>
+          <a:p>
+            <a:pPr marL="0" indent="0">
+              <a:lnSpc>
+                <a:spcPct val="90000"/>
+              </a:lnSpc>
+              <a:buNone/>
+            </a:pPr>
+            <a:endParaRPr lang="en-US" sz="1700" dirty="0">
+              <a:solidFill>
+                <a:schemeClr val="bg1"/>
+              </a:solidFill>
+            </a:endParaRPr>
+          </a:p>
+          <a:p>
+            <a:pPr>
+              <a:lnSpc>
+                <a:spcPct val="90000"/>
+              </a:lnSpc>
+            </a:pPr>
+            <a:r>
+              <a:rPr lang="en-US" sz="1700" dirty="0">
+                <a:solidFill>
+                  <a:schemeClr val="bg1"/>
+                </a:solidFill>
+              </a:rPr>
+              <a:t>Evaluate the Effectiveness of LLMs in detecting Polarization.</a:t>
+            </a:r>
+          </a:p>
+          <a:p>
+            <a:pPr>
+              <a:lnSpc>
+                <a:spcPct val="90000"/>
+              </a:lnSpc>
+            </a:pPr>
+            <a:endParaRPr lang="en-US" sz="1700" dirty="0">
+              <a:solidFill>
+                <a:schemeClr val="bg1"/>
+              </a:solidFill>
+            </a:endParaRPr>
+          </a:p>
+          <a:p>
+            <a:pPr>
+              <a:lnSpc>
+                <a:spcPct val="90000"/>
+              </a:lnSpc>
+            </a:pPr>
+            <a:r>
+              <a:rPr lang="en-US" sz="1700" dirty="0">
+                <a:solidFill>
+                  <a:schemeClr val="bg1"/>
+                </a:solidFill>
+              </a:rPr>
+              <a:t>Fine-Tune Mistral to replicate GPT locally</a:t>
+            </a:r>
+          </a:p>
+          <a:p>
+            <a:pPr>
+              <a:lnSpc>
+                <a:spcPct val="90000"/>
+              </a:lnSpc>
+            </a:pPr>
+            <a:endParaRPr lang="en-US" sz="1700" dirty="0">
+              <a:solidFill>
+                <a:schemeClr val="bg1"/>
+              </a:solidFill>
+            </a:endParaRPr>
+          </a:p>
+        </p:txBody>
+      </p:sp>
+      <p:pic>
+        <p:nvPicPr>
+          <p:cNvPr id="4" name="Picture 3" descr="A diagram of a company&#10;&#10;AI-generated content may be incorrect.">
+            <a:extLst>
+              <a:ext uri="{FF2B5EF4-FFF2-40B4-BE49-F238E27FC236}">
+                <a16:creationId xmlns:a16="http://schemas.microsoft.com/office/drawing/2014/main" id="{DE3A7A3B-CC24-009F-43A2-3B34FDBF01A7}"/>
+              </a:ext>
+            </a:extLst>
+          </p:cNvPr>
+          <p:cNvPicPr>
+            <a:picLocks noChangeAspect="1"/>
+          </p:cNvPicPr>
+          <p:nvPr/>
+        </p:nvPicPr>
+        <p:blipFill>
+          <a:blip r:embed="rId2">
+            <a:extLst>
+              <a:ext uri="{28A0092B-C50C-407E-A947-70E740481C1C}">
+                <a14:useLocalDpi xmlns:a14="http://schemas.microsoft.com/office/drawing/2010/main" val="0"/>
+              </a:ext>
+            </a:extLst>
+          </a:blip>
+          <a:stretch>
+            <a:fillRect/>
+          </a:stretch>
+        </p:blipFill>
+        <p:spPr bwMode="auto">
+          <a:xfrm>
+            <a:off x="6731310" y="76117"/>
+            <a:ext cx="3805518" cy="6705760"/>
+          </a:xfrm>
+          <a:prstGeom prst="rect">
+            <a:avLst/>
+          </a:prstGeom>
+          <a:noFill/>
+        </p:spPr>
+      </p:pic>
+      <p:sp>
+        <p:nvSpPr>
+          <p:cNvPr id="15" name="Isosceles Triangle 14">
+            <a:extLst>
+              <a:ext uri="{FF2B5EF4-FFF2-40B4-BE49-F238E27FC236}">
+                <a16:creationId xmlns:a16="http://schemas.microsoft.com/office/drawing/2014/main" id="{B2205F6E-03C6-4E92-877C-E2482F6599AA}"/>
+              </a:ext>
+              <a:ext uri="{C183D7F6-B498-43B3-948B-1728B52AA6E4}">
+                <adec:decorative xmlns:adec="http://schemas.microsoft.com/office/drawing/2017/decorative" val="1"/>
+              </a:ext>
+            </a:extLst>
+          </p:cNvPr>
+          <p:cNvSpPr>
+            <a:spLocks noGrp="1" noRot="1" noChangeAspect="1" noMove="1" noResize="1" noEditPoints="1" noAdjustHandles="1" noChangeArrowheads="1" noChangeShapeType="1" noTextEdit="1"/>
+          </p:cNvSpPr>
+          <p:nvPr>
+            <p:extLst>
+              <p:ext uri="{386F3935-93C4-4BCD-93E2-E3B085C9AB24}">
+                <p16:designElem xmlns:p16="http://schemas.microsoft.com/office/powerpoint/2015/main" val="1"/>
+              </p:ext>
+            </p:extLst>
+          </p:nvPr>
+        </p:nvSpPr>
+        <p:spPr>
+          <a:xfrm flipH="1">
+            <a:off x="11755696" y="4013200"/>
+            <a:ext cx="448733" cy="2844800"/>
+          </a:xfrm>
+          <a:prstGeom prst="triangle">
+            <a:avLst>
+              <a:gd name="adj" fmla="val 0"/>
+            </a:avLst>
+          </a:prstGeom>
+          <a:solidFill>
+            <a:schemeClr val="accent1">
+              <a:alpha val="85000"/>
+            </a:schemeClr>
+          </a:solidFill>
+          <a:ln>
+            <a:noFill/>
+          </a:ln>
+          <a:effectLst/>
+        </p:spPr>
+        <p:style>
+          <a:lnRef idx="1">
+            <a:schemeClr val="accent1"/>
+          </a:lnRef>
+          <a:fillRef idx="3">
+            <a:schemeClr val="accent1"/>
+          </a:fillRef>
+          <a:effectRef idx="2">
+            <a:schemeClr val="accent1"/>
+          </a:effectRef>
+          <a:fontRef idx="minor">
+            <a:schemeClr val="lt1"/>
+          </a:fontRef>
+        </p:style>
+        <p:txBody>
+          <a:bodyPr/>
+          <a:lstStyle/>
+          <a:p>
+            <a:endParaRPr lang="en-US" dirty="0"/>
+          </a:p>
+        </p:txBody>
+      </p:sp>
+    </p:spTree>
+    <p:extLst>
+      <p:ext uri="{BB962C8B-B14F-4D97-AF65-F5344CB8AC3E}">
+        <p14:creationId xmlns:p14="http://schemas.microsoft.com/office/powerpoint/2010/main" val="2444627364"/>
+      </p:ext>
+    </p:extLst>
+  </p:cSld>
+  <p:clrMapOvr>
+    <a:masterClrMapping/>
+  </p:clrMapOvr>
+</p:sld>
+</file>
+
+<file path=ppt/slides/slide8.xml><?xml version="1.0" encoding="utf-8"?>
 <p:sld xmlns:a="http://schemas.openxmlformats.org/drawingml/2006/main" xmlns:r="http://schemas.openxmlformats.org/officeDocument/2006/relationships" xmlns:p="http://schemas.openxmlformats.org/presentationml/2006/main">
   <p:cSld>
     <p:bg>
@@ -23289,7 +24098,7 @@
 </p:sld>
 </file>
 
-<file path=ppt/slides/slide7.xml><?xml version="1.0" encoding="utf-8"?>
+<file path=ppt/slides/slide9.xml><?xml version="1.0" encoding="utf-8"?>
 <p:sld xmlns:a="http://schemas.openxmlformats.org/drawingml/2006/main" xmlns:r="http://schemas.openxmlformats.org/officeDocument/2006/relationships" xmlns:p="http://schemas.openxmlformats.org/presentationml/2006/main">
   <p:cSld>
     <p:spTree>
@@ -23360,587 +24169,6 @@
     <p:extLst>
       <p:ext uri="{BB962C8B-B14F-4D97-AF65-F5344CB8AC3E}">
         <p14:creationId xmlns:p14="http://schemas.microsoft.com/office/powerpoint/2010/main" val="3629221790"/>
-      </p:ext>
-    </p:extLst>
-  </p:cSld>
-  <p:clrMapOvr>
-    <a:masterClrMapping/>
-  </p:clrMapOvr>
-</p:sld>
-</file>
-
-<file path=ppt/slides/slide8.xml><?xml version="1.0" encoding="utf-8"?>
-<p:sld xmlns:a="http://schemas.openxmlformats.org/drawingml/2006/main" xmlns:r="http://schemas.openxmlformats.org/officeDocument/2006/relationships" xmlns:p="http://schemas.openxmlformats.org/presentationml/2006/main">
-  <p:cSld>
-    <p:bg>
-      <p:bgPr>
-        <a:solidFill>
-          <a:schemeClr val="bg1"/>
-        </a:solidFill>
-        <a:effectLst/>
-      </p:bgPr>
-    </p:bg>
-    <p:spTree>
-      <p:nvGrpSpPr>
-        <p:cNvPr id="1" name=""/>
-        <p:cNvGrpSpPr/>
-        <p:nvPr/>
-      </p:nvGrpSpPr>
-      <p:grpSpPr>
-        <a:xfrm>
-          <a:off x="0" y="0"/>
-          <a:ext cx="0" cy="0"/>
-          <a:chOff x="0" y="0"/>
-          <a:chExt cx="0" cy="0"/>
-        </a:xfrm>
-      </p:grpSpPr>
-      <p:sp useBgFill="1">
-        <p:nvSpPr>
-          <p:cNvPr id="9" name="Rectangle 8">
-            <a:extLst>
-              <a:ext uri="{FF2B5EF4-FFF2-40B4-BE49-F238E27FC236}">
-                <a16:creationId xmlns:a16="http://schemas.microsoft.com/office/drawing/2014/main" id="{9F4444CE-BC8D-4D61-B303-4C05614E62AB}"/>
-              </a:ext>
-              <a:ext uri="{C183D7F6-B498-43B3-948B-1728B52AA6E4}">
-                <adec:decorative xmlns:adec="http://schemas.microsoft.com/office/drawing/2017/decorative" val="1"/>
-              </a:ext>
-            </a:extLst>
-          </p:cNvPr>
-          <p:cNvSpPr>
-            <a:spLocks noGrp="1" noRot="1" noChangeAspect="1" noMove="1" noResize="1" noEditPoints="1" noAdjustHandles="1" noChangeArrowheads="1" noChangeShapeType="1" noTextEdit="1"/>
-          </p:cNvSpPr>
-          <p:nvPr>
-            <p:extLst>
-              <p:ext uri="{386F3935-93C4-4BCD-93E2-E3B085C9AB24}">
-                <p16:designElem xmlns:p16="http://schemas.microsoft.com/office/powerpoint/2015/main" val="1"/>
-              </p:ext>
-            </p:extLst>
-          </p:nvPr>
-        </p:nvSpPr>
-        <p:spPr>
-          <a:xfrm>
-            <a:off x="0" y="0"/>
-            <a:ext cx="12192000" cy="6858000"/>
-          </a:xfrm>
-          <a:prstGeom prst="rect">
-            <a:avLst/>
-          </a:prstGeom>
-          <a:ln>
-            <a:noFill/>
-          </a:ln>
-        </p:spPr>
-        <p:style>
-          <a:lnRef idx="2">
-            <a:schemeClr val="accent1">
-              <a:shade val="50000"/>
-            </a:schemeClr>
-          </a:lnRef>
-          <a:fillRef idx="1">
-            <a:schemeClr val="accent1"/>
-          </a:fillRef>
-          <a:effectRef idx="0">
-            <a:schemeClr val="accent1"/>
-          </a:effectRef>
-          <a:fontRef idx="minor">
-            <a:schemeClr val="lt1"/>
-          </a:fontRef>
-        </p:style>
-        <p:txBody>
-          <a:bodyPr rtlCol="0" anchor="ctr"/>
-          <a:lstStyle/>
-          <a:p>
-            <a:pPr algn="ctr"/>
-            <a:endParaRPr lang="en-US"/>
-          </a:p>
-        </p:txBody>
-      </p:sp>
-      <p:sp>
-        <p:nvSpPr>
-          <p:cNvPr id="11" name="Rectangle 10">
-            <a:extLst>
-              <a:ext uri="{FF2B5EF4-FFF2-40B4-BE49-F238E27FC236}">
-                <a16:creationId xmlns:a16="http://schemas.microsoft.com/office/drawing/2014/main" id="{62423CA5-E2E1-4789-B759-9906C1C94063}"/>
-              </a:ext>
-              <a:ext uri="{C183D7F6-B498-43B3-948B-1728B52AA6E4}">
-                <adec:decorative xmlns:adec="http://schemas.microsoft.com/office/drawing/2017/decorative" val="1"/>
-              </a:ext>
-            </a:extLst>
-          </p:cNvPr>
-          <p:cNvSpPr>
-            <a:spLocks noGrp="1" noRot="1" noChangeAspect="1" noMove="1" noResize="1" noEditPoints="1" noAdjustHandles="1" noChangeArrowheads="1" noChangeShapeType="1" noTextEdit="1"/>
-          </p:cNvSpPr>
-          <p:nvPr>
-            <p:extLst>
-              <p:ext uri="{386F3935-93C4-4BCD-93E2-E3B085C9AB24}">
-                <p16:designElem xmlns:p16="http://schemas.microsoft.com/office/powerpoint/2015/main" val="1"/>
-              </p:ext>
-            </p:extLst>
-          </p:nvPr>
-        </p:nvSpPr>
-        <p:spPr>
-          <a:xfrm>
-            <a:off x="0" y="-3"/>
-            <a:ext cx="4660126" cy="6858000"/>
-          </a:xfrm>
-          <a:prstGeom prst="rect">
-            <a:avLst/>
-          </a:prstGeom>
-          <a:solidFill>
-            <a:schemeClr val="tx2"/>
-          </a:solidFill>
-          <a:ln>
-            <a:noFill/>
-          </a:ln>
-          <a:effectLst/>
-        </p:spPr>
-        <p:style>
-          <a:lnRef idx="1">
-            <a:schemeClr val="accent1"/>
-          </a:lnRef>
-          <a:fillRef idx="3">
-            <a:schemeClr val="accent1"/>
-          </a:fillRef>
-          <a:effectRef idx="2">
-            <a:schemeClr val="accent1"/>
-          </a:effectRef>
-          <a:fontRef idx="minor">
-            <a:schemeClr val="lt1"/>
-          </a:fontRef>
-        </p:style>
-        <p:txBody>
-          <a:bodyPr/>
-          <a:lstStyle/>
-          <a:p>
-            <a:endParaRPr lang="en-US"/>
-          </a:p>
-        </p:txBody>
-      </p:sp>
-      <p:sp>
-        <p:nvSpPr>
-          <p:cNvPr id="13" name="Isosceles Triangle 12">
-            <a:extLst>
-              <a:ext uri="{FF2B5EF4-FFF2-40B4-BE49-F238E27FC236}">
-                <a16:creationId xmlns:a16="http://schemas.microsoft.com/office/drawing/2014/main" id="{73772B81-181F-48B7-8826-4D9686D15DF5}"/>
-              </a:ext>
-              <a:ext uri="{C183D7F6-B498-43B3-948B-1728B52AA6E4}">
-                <adec:decorative xmlns:adec="http://schemas.microsoft.com/office/drawing/2017/decorative" val="1"/>
-              </a:ext>
-            </a:extLst>
-          </p:cNvPr>
-          <p:cNvSpPr>
-            <a:spLocks noGrp="1" noRot="1" noChangeAspect="1" noMove="1" noResize="1" noEditPoints="1" noAdjustHandles="1" noChangeArrowheads="1" noChangeShapeType="1" noTextEdit="1"/>
-          </p:cNvSpPr>
-          <p:nvPr>
-            <p:extLst>
-              <p:ext uri="{386F3935-93C4-4BCD-93E2-E3B085C9AB24}">
-                <p16:designElem xmlns:p16="http://schemas.microsoft.com/office/powerpoint/2015/main" val="1"/>
-              </p:ext>
-            </p:extLst>
-          </p:nvPr>
-        </p:nvSpPr>
-        <p:spPr>
-          <a:xfrm rot="10800000">
-            <a:off x="4660127" y="-3"/>
-            <a:ext cx="1056745" cy="6858001"/>
-          </a:xfrm>
-          <a:prstGeom prst="triangle">
-            <a:avLst>
-              <a:gd name="adj" fmla="val 100000"/>
-            </a:avLst>
-          </a:prstGeom>
-          <a:solidFill>
-            <a:schemeClr val="tx2"/>
-          </a:solidFill>
-          <a:ln>
-            <a:noFill/>
-          </a:ln>
-          <a:effectLst/>
-        </p:spPr>
-        <p:style>
-          <a:lnRef idx="1">
-            <a:schemeClr val="accent1"/>
-          </a:lnRef>
-          <a:fillRef idx="3">
-            <a:schemeClr val="accent1"/>
-          </a:fillRef>
-          <a:effectRef idx="2">
-            <a:schemeClr val="accent1"/>
-          </a:effectRef>
-          <a:fontRef idx="minor">
-            <a:schemeClr val="lt1"/>
-          </a:fontRef>
-        </p:style>
-        <p:txBody>
-          <a:bodyPr/>
-          <a:lstStyle/>
-          <a:p>
-            <a:endParaRPr lang="en-US" dirty="0"/>
-          </a:p>
-        </p:txBody>
-      </p:sp>
-      <p:sp>
-        <p:nvSpPr>
-          <p:cNvPr id="2" name="Title 1">
-            <a:extLst>
-              <a:ext uri="{FF2B5EF4-FFF2-40B4-BE49-F238E27FC236}">
-                <a16:creationId xmlns:a16="http://schemas.microsoft.com/office/drawing/2014/main" id="{16167624-3D20-980D-ABF6-0F2D1EABF3A4}"/>
-              </a:ext>
-            </a:extLst>
-          </p:cNvPr>
-          <p:cNvSpPr>
-            <a:spLocks noGrp="1"/>
-          </p:cNvSpPr>
-          <p:nvPr>
-            <p:ph type="title"/>
-          </p:nvPr>
-        </p:nvSpPr>
-        <p:spPr>
-          <a:xfrm>
-            <a:off x="673754" y="643467"/>
-            <a:ext cx="4203045" cy="1375608"/>
-          </a:xfrm>
-        </p:spPr>
-        <p:txBody>
-          <a:bodyPr anchor="ctr">
-            <a:normAutofit/>
-          </a:bodyPr>
-          <a:lstStyle/>
-          <a:p>
-            <a:r>
-              <a:rPr lang="en-US">
-                <a:solidFill>
-                  <a:schemeClr val="bg1"/>
-                </a:solidFill>
-              </a:rPr>
-              <a:t>Objectives</a:t>
-            </a:r>
-          </a:p>
-        </p:txBody>
-      </p:sp>
-      <p:sp>
-        <p:nvSpPr>
-          <p:cNvPr id="3" name="Content Placeholder 2">
-            <a:extLst>
-              <a:ext uri="{FF2B5EF4-FFF2-40B4-BE49-F238E27FC236}">
-                <a16:creationId xmlns:a16="http://schemas.microsoft.com/office/drawing/2014/main" id="{8BF9DB96-FB40-24D7-E66B-8730DE1DA949}"/>
-              </a:ext>
-            </a:extLst>
-          </p:cNvPr>
-          <p:cNvSpPr>
-            <a:spLocks noGrp="1"/>
-          </p:cNvSpPr>
-          <p:nvPr>
-            <p:ph idx="1"/>
-          </p:nvPr>
-        </p:nvSpPr>
-        <p:spPr>
-          <a:xfrm>
-            <a:off x="673754" y="2160590"/>
-            <a:ext cx="3973943" cy="3440110"/>
-          </a:xfrm>
-        </p:spPr>
-        <p:txBody>
-          <a:bodyPr>
-            <a:normAutofit/>
-          </a:bodyPr>
-          <a:lstStyle/>
-          <a:p>
-            <a:pPr>
-              <a:lnSpc>
-                <a:spcPct val="90000"/>
-              </a:lnSpc>
-            </a:pPr>
-            <a:r>
-              <a:rPr lang="en-US" sz="1700" dirty="0">
-                <a:solidFill>
-                  <a:schemeClr val="bg1"/>
-                </a:solidFill>
-              </a:rPr>
-              <a:t>Address the limitations of the POLAR Pipeline</a:t>
-            </a:r>
-          </a:p>
-          <a:p>
-            <a:pPr>
-              <a:lnSpc>
-                <a:spcPct val="90000"/>
-              </a:lnSpc>
-            </a:pPr>
-            <a:endParaRPr lang="en-US" sz="1700" dirty="0">
-              <a:solidFill>
-                <a:schemeClr val="bg1"/>
-              </a:solidFill>
-            </a:endParaRPr>
-          </a:p>
-          <a:p>
-            <a:pPr>
-              <a:lnSpc>
-                <a:spcPct val="90000"/>
-              </a:lnSpc>
-            </a:pPr>
-            <a:r>
-              <a:rPr lang="en-US" sz="1700" dirty="0">
-                <a:solidFill>
-                  <a:schemeClr val="bg1"/>
-                </a:solidFill>
-              </a:rPr>
-              <a:t>Integrate LLMs into the POLAR Pipeline for Attitude Detection</a:t>
-            </a:r>
-          </a:p>
-          <a:p>
-            <a:pPr marL="0" indent="0">
-              <a:lnSpc>
-                <a:spcPct val="90000"/>
-              </a:lnSpc>
-              <a:buNone/>
-            </a:pPr>
-            <a:endParaRPr lang="en-US" sz="1700" dirty="0">
-              <a:solidFill>
-                <a:schemeClr val="bg1"/>
-              </a:solidFill>
-            </a:endParaRPr>
-          </a:p>
-          <a:p>
-            <a:pPr>
-              <a:lnSpc>
-                <a:spcPct val="90000"/>
-              </a:lnSpc>
-            </a:pPr>
-            <a:r>
-              <a:rPr lang="en-US" sz="1700" dirty="0">
-                <a:solidFill>
-                  <a:schemeClr val="bg1"/>
-                </a:solidFill>
-              </a:rPr>
-              <a:t>Evaluate the Effectiveness of LLMs in detecting Polarization.</a:t>
-            </a:r>
-          </a:p>
-          <a:p>
-            <a:pPr>
-              <a:lnSpc>
-                <a:spcPct val="90000"/>
-              </a:lnSpc>
-            </a:pPr>
-            <a:endParaRPr lang="en-US" sz="1700" dirty="0">
-              <a:solidFill>
-                <a:schemeClr val="bg1"/>
-              </a:solidFill>
-            </a:endParaRPr>
-          </a:p>
-          <a:p>
-            <a:pPr>
-              <a:lnSpc>
-                <a:spcPct val="90000"/>
-              </a:lnSpc>
-            </a:pPr>
-            <a:r>
-              <a:rPr lang="en-US" sz="1700" dirty="0">
-                <a:solidFill>
-                  <a:schemeClr val="bg1"/>
-                </a:solidFill>
-              </a:rPr>
-              <a:t>Fine-Tune Mistral to replicate GPT locally</a:t>
-            </a:r>
-          </a:p>
-          <a:p>
-            <a:pPr>
-              <a:lnSpc>
-                <a:spcPct val="90000"/>
-              </a:lnSpc>
-            </a:pPr>
-            <a:endParaRPr lang="en-US" sz="1700" dirty="0">
-              <a:solidFill>
-                <a:schemeClr val="bg1"/>
-              </a:solidFill>
-            </a:endParaRPr>
-          </a:p>
-        </p:txBody>
-      </p:sp>
-      <p:pic>
-        <p:nvPicPr>
-          <p:cNvPr id="4" name="Picture 3" descr="A diagram of a company&#10;&#10;AI-generated content may be incorrect.">
-            <a:extLst>
-              <a:ext uri="{FF2B5EF4-FFF2-40B4-BE49-F238E27FC236}">
-                <a16:creationId xmlns:a16="http://schemas.microsoft.com/office/drawing/2014/main" id="{DE3A7A3B-CC24-009F-43A2-3B34FDBF01A7}"/>
-              </a:ext>
-            </a:extLst>
-          </p:cNvPr>
-          <p:cNvPicPr>
-            <a:picLocks noChangeAspect="1"/>
-          </p:cNvPicPr>
-          <p:nvPr/>
-        </p:nvPicPr>
-        <p:blipFill>
-          <a:blip r:embed="rId2">
-            <a:extLst>
-              <a:ext uri="{28A0092B-C50C-407E-A947-70E740481C1C}">
-                <a14:useLocalDpi xmlns:a14="http://schemas.microsoft.com/office/drawing/2010/main" val="0"/>
-              </a:ext>
-            </a:extLst>
-          </a:blip>
-          <a:stretch>
-            <a:fillRect/>
-          </a:stretch>
-        </p:blipFill>
-        <p:spPr bwMode="auto">
-          <a:xfrm>
-            <a:off x="6731310" y="76117"/>
-            <a:ext cx="3805518" cy="6705760"/>
-          </a:xfrm>
-          <a:prstGeom prst="rect">
-            <a:avLst/>
-          </a:prstGeom>
-          <a:noFill/>
-        </p:spPr>
-      </p:pic>
-      <p:sp>
-        <p:nvSpPr>
-          <p:cNvPr id="15" name="Isosceles Triangle 14">
-            <a:extLst>
-              <a:ext uri="{FF2B5EF4-FFF2-40B4-BE49-F238E27FC236}">
-                <a16:creationId xmlns:a16="http://schemas.microsoft.com/office/drawing/2014/main" id="{B2205F6E-03C6-4E92-877C-E2482F6599AA}"/>
-              </a:ext>
-              <a:ext uri="{C183D7F6-B498-43B3-948B-1728B52AA6E4}">
-                <adec:decorative xmlns:adec="http://schemas.microsoft.com/office/drawing/2017/decorative" val="1"/>
-              </a:ext>
-            </a:extLst>
-          </p:cNvPr>
-          <p:cNvSpPr>
-            <a:spLocks noGrp="1" noRot="1" noChangeAspect="1" noMove="1" noResize="1" noEditPoints="1" noAdjustHandles="1" noChangeArrowheads="1" noChangeShapeType="1" noTextEdit="1"/>
-          </p:cNvSpPr>
-          <p:nvPr>
-            <p:extLst>
-              <p:ext uri="{386F3935-93C4-4BCD-93E2-E3B085C9AB24}">
-                <p16:designElem xmlns:p16="http://schemas.microsoft.com/office/powerpoint/2015/main" val="1"/>
-              </p:ext>
-            </p:extLst>
-          </p:nvPr>
-        </p:nvSpPr>
-        <p:spPr>
-          <a:xfrm flipH="1">
-            <a:off x="11755696" y="4013200"/>
-            <a:ext cx="448733" cy="2844800"/>
-          </a:xfrm>
-          <a:prstGeom prst="triangle">
-            <a:avLst>
-              <a:gd name="adj" fmla="val 0"/>
-            </a:avLst>
-          </a:prstGeom>
-          <a:solidFill>
-            <a:schemeClr val="accent1">
-              <a:alpha val="85000"/>
-            </a:schemeClr>
-          </a:solidFill>
-          <a:ln>
-            <a:noFill/>
-          </a:ln>
-          <a:effectLst/>
-        </p:spPr>
-        <p:style>
-          <a:lnRef idx="1">
-            <a:schemeClr val="accent1"/>
-          </a:lnRef>
-          <a:fillRef idx="3">
-            <a:schemeClr val="accent1"/>
-          </a:fillRef>
-          <a:effectRef idx="2">
-            <a:schemeClr val="accent1"/>
-          </a:effectRef>
-          <a:fontRef idx="minor">
-            <a:schemeClr val="lt1"/>
-          </a:fontRef>
-        </p:style>
-        <p:txBody>
-          <a:bodyPr/>
-          <a:lstStyle/>
-          <a:p>
-            <a:endParaRPr lang="en-US" dirty="0"/>
-          </a:p>
-        </p:txBody>
-      </p:sp>
-    </p:spTree>
-    <p:extLst>
-      <p:ext uri="{BB962C8B-B14F-4D97-AF65-F5344CB8AC3E}">
-        <p14:creationId xmlns:p14="http://schemas.microsoft.com/office/powerpoint/2010/main" val="2444627364"/>
-      </p:ext>
-    </p:extLst>
-  </p:cSld>
-  <p:clrMapOvr>
-    <a:masterClrMapping/>
-  </p:clrMapOvr>
-</p:sld>
-</file>
-
-<file path=ppt/slides/slide9.xml><?xml version="1.0" encoding="utf-8"?>
-<p:sld xmlns:a="http://schemas.openxmlformats.org/drawingml/2006/main" xmlns:r="http://schemas.openxmlformats.org/officeDocument/2006/relationships" xmlns:p="http://schemas.openxmlformats.org/presentationml/2006/main">
-  <p:cSld>
-    <p:spTree>
-      <p:nvGrpSpPr>
-        <p:cNvPr id="1" name=""/>
-        <p:cNvGrpSpPr/>
-        <p:nvPr/>
-      </p:nvGrpSpPr>
-      <p:grpSpPr>
-        <a:xfrm>
-          <a:off x="0" y="0"/>
-          <a:ext cx="0" cy="0"/>
-          <a:chOff x="0" y="0"/>
-          <a:chExt cx="0" cy="0"/>
-        </a:xfrm>
-      </p:grpSpPr>
-      <p:sp>
-        <p:nvSpPr>
-          <p:cNvPr id="2" name="Title 1">
-            <a:extLst>
-              <a:ext uri="{FF2B5EF4-FFF2-40B4-BE49-F238E27FC236}">
-                <a16:creationId xmlns:a16="http://schemas.microsoft.com/office/drawing/2014/main" id="{B238884A-5BAC-2750-7802-57CB045C94A4}"/>
-              </a:ext>
-            </a:extLst>
-          </p:cNvPr>
-          <p:cNvSpPr>
-            <a:spLocks noGrp="1"/>
-          </p:cNvSpPr>
-          <p:nvPr>
-            <p:ph type="title"/>
-          </p:nvPr>
-        </p:nvSpPr>
-        <p:spPr/>
-        <p:txBody>
-          <a:bodyPr/>
-          <a:lstStyle/>
-          <a:p>
-            <a:endParaRPr lang="en-US"/>
-          </a:p>
-        </p:txBody>
-      </p:sp>
-      <p:sp>
-        <p:nvSpPr>
-          <p:cNvPr id="3" name="Content Placeholder 2">
-            <a:extLst>
-              <a:ext uri="{FF2B5EF4-FFF2-40B4-BE49-F238E27FC236}">
-                <a16:creationId xmlns:a16="http://schemas.microsoft.com/office/drawing/2014/main" id="{9F75DA6D-F868-2D25-50F5-7347A3507914}"/>
-              </a:ext>
-            </a:extLst>
-          </p:cNvPr>
-          <p:cNvSpPr>
-            <a:spLocks noGrp="1"/>
-          </p:cNvSpPr>
-          <p:nvPr>
-            <p:ph idx="1"/>
-          </p:nvPr>
-        </p:nvSpPr>
-        <p:spPr/>
-        <p:txBody>
-          <a:bodyPr/>
-          <a:lstStyle/>
-          <a:p>
-            <a:endParaRPr lang="en-US"/>
-          </a:p>
-        </p:txBody>
-      </p:sp>
-    </p:spTree>
-    <p:extLst>
-      <p:ext uri="{BB962C8B-B14F-4D97-AF65-F5344CB8AC3E}">
-        <p14:creationId xmlns:p14="http://schemas.microsoft.com/office/powerpoint/2010/main" val="404403540"/>
       </p:ext>
     </p:extLst>
   </p:cSld>

--- a/Documentation/Thesis_Defend.PPTX
+++ b/Documentation/Thesis_Defend.PPTX
@@ -23302,12 +23302,319 @@
             <p:ph idx="1"/>
           </p:nvPr>
         </p:nvSpPr>
-        <p:spPr/>
+        <p:spPr>
+          <a:xfrm>
+            <a:off x="677334" y="1722923"/>
+            <a:ext cx="10632350" cy="4318440"/>
+          </a:xfrm>
+        </p:spPr>
         <p:txBody>
-          <a:bodyPr/>
+          <a:bodyPr>
+            <a:normAutofit fontScale="92500" lnSpcReduction="10000"/>
+          </a:bodyPr>
           <a:lstStyle/>
           <a:p>
-            <a:endParaRPr lang="en-US"/>
+            <a:pPr marL="0" indent="0">
+              <a:buNone/>
+            </a:pPr>
+            <a:r>
+              <a:rPr lang="en-US" sz="1900" dirty="0"/>
+              <a:t>Entity/Noun Phrase Extraction rely on </a:t>
+            </a:r>
+            <a:r>
+              <a:rPr lang="en-US" sz="1900" dirty="0" err="1"/>
+              <a:t>SpaCy</a:t>
+            </a:r>
+            <a:r>
+              <a:rPr lang="en-US" sz="1900" dirty="0"/>
+              <a:t> [ ], an NLP component error prone to </a:t>
+            </a:r>
+            <a:r>
+              <a:rPr lang="en-US" sz="1900" b="1" dirty="0"/>
+              <a:t>Dictionary errors </a:t>
+            </a:r>
+            <a:r>
+              <a:rPr lang="en-US" sz="1900" dirty="0"/>
+              <a:t>and </a:t>
+            </a:r>
+            <a:r>
+              <a:rPr lang="en-US" sz="1900" b="1" dirty="0"/>
+              <a:t>Dependency Parsing Errors</a:t>
+            </a:r>
+          </a:p>
+          <a:p>
+            <a:pPr>
+              <a:lnSpc>
+                <a:spcPct val="115000"/>
+              </a:lnSpc>
+              <a:spcAft>
+                <a:spcPts val="800"/>
+              </a:spcAft>
+              <a:buNone/>
+            </a:pPr>
+            <a:r>
+              <a:rPr lang="en-US" sz="1800" b="1" kern="100" dirty="0">
+                <a:effectLst/>
+                <a:latin typeface="Times New Roman" panose="02020603050405020304" pitchFamily="18" charset="0"/>
+                <a:ea typeface="Aptos" panose="020B0004020202020204" pitchFamily="34" charset="0"/>
+                <a:cs typeface="Times New Roman" panose="02020603050405020304" pitchFamily="18" charset="0"/>
+              </a:rPr>
+              <a:t>Example:</a:t>
+            </a:r>
+            <a:endParaRPr lang="en-CY" sz="1800" kern="100" dirty="0">
+              <a:effectLst/>
+              <a:latin typeface="Aptos" panose="020B0004020202020204" pitchFamily="34" charset="0"/>
+              <a:ea typeface="Aptos" panose="020B0004020202020204" pitchFamily="34" charset="0"/>
+              <a:cs typeface="Times New Roman" panose="02020603050405020304" pitchFamily="18" charset="0"/>
+            </a:endParaRPr>
+          </a:p>
+          <a:p>
+            <a:pPr>
+              <a:lnSpc>
+                <a:spcPct val="115000"/>
+              </a:lnSpc>
+              <a:spcAft>
+                <a:spcPts val="800"/>
+              </a:spcAft>
+              <a:buNone/>
+            </a:pPr>
+            <a:r>
+              <a:rPr lang="en-US" sz="1800" b="1" kern="100" dirty="0">
+                <a:effectLst/>
+                <a:latin typeface="Times New Roman" panose="02020603050405020304" pitchFamily="18" charset="0"/>
+                <a:ea typeface="Aptos" panose="020B0004020202020204" pitchFamily="34" charset="0"/>
+                <a:cs typeface="Times New Roman" panose="02020603050405020304" pitchFamily="18" charset="0"/>
+              </a:rPr>
+              <a:t>	entity1</a:t>
+            </a:r>
+            <a:r>
+              <a:rPr lang="en-US" sz="1800" kern="100" dirty="0">
+                <a:effectLst/>
+                <a:latin typeface="Times New Roman" panose="02020603050405020304" pitchFamily="18" charset="0"/>
+                <a:ea typeface="Aptos" panose="020B0004020202020204" pitchFamily="34" charset="0"/>
+                <a:cs typeface="Times New Roman" panose="02020603050405020304" pitchFamily="18" charset="0"/>
+              </a:rPr>
+              <a:t>: “Howard” -&gt; reference: "http://dbpedia.org/resource/John_Howard" </a:t>
+            </a:r>
+            <a:br>
+              <a:rPr lang="en-US" sz="1800" kern="100" dirty="0">
+                <a:effectLst/>
+                <a:latin typeface="Times New Roman" panose="02020603050405020304" pitchFamily="18" charset="0"/>
+                <a:ea typeface="Aptos" panose="020B0004020202020204" pitchFamily="34" charset="0"/>
+                <a:cs typeface="Times New Roman" panose="02020603050405020304" pitchFamily="18" charset="0"/>
+              </a:rPr>
+            </a:br>
+            <a:r>
+              <a:rPr lang="en-US" sz="1800" b="1" kern="100" dirty="0">
+                <a:effectLst/>
+                <a:latin typeface="Times New Roman" panose="02020603050405020304" pitchFamily="18" charset="0"/>
+                <a:ea typeface="Aptos" panose="020B0004020202020204" pitchFamily="34" charset="0"/>
+                <a:cs typeface="Times New Roman" panose="02020603050405020304" pitchFamily="18" charset="0"/>
+              </a:rPr>
+              <a:t>entity2</a:t>
+            </a:r>
+            <a:r>
+              <a:rPr lang="en-US" sz="1800" kern="100" dirty="0">
+                <a:effectLst/>
+                <a:latin typeface="Times New Roman" panose="02020603050405020304" pitchFamily="18" charset="0"/>
+                <a:ea typeface="Aptos" panose="020B0004020202020204" pitchFamily="34" charset="0"/>
+                <a:cs typeface="Times New Roman" panose="02020603050405020304" pitchFamily="18" charset="0"/>
+              </a:rPr>
+              <a:t>:  "Schneider" -&gt; reference: “</a:t>
+            </a:r>
+            <a:r>
+              <a:rPr lang="en-US" sz="1800" u="sng" kern="100" dirty="0">
+                <a:solidFill>
+                  <a:srgbClr val="467886"/>
+                </a:solidFill>
+                <a:effectLst/>
+                <a:latin typeface="Times New Roman" panose="02020603050405020304" pitchFamily="18" charset="0"/>
+                <a:ea typeface="Aptos" panose="020B0004020202020204" pitchFamily="34" charset="0"/>
+                <a:cs typeface="Times New Roman" panose="02020603050405020304" pitchFamily="18" charset="0"/>
+                <a:hlinkClick r:id="rId2"/>
+              </a:rPr>
+              <a:t>http://dbpedia.org/resource/</a:t>
+            </a:r>
+            <a:r>
+              <a:rPr lang="en-US" sz="1800" u="sng" kern="100" dirty="0" err="1">
+                <a:solidFill>
+                  <a:srgbClr val="467886"/>
+                </a:solidFill>
+                <a:effectLst/>
+                <a:latin typeface="Times New Roman" panose="02020603050405020304" pitchFamily="18" charset="0"/>
+                <a:ea typeface="Aptos" panose="020B0004020202020204" pitchFamily="34" charset="0"/>
+                <a:cs typeface="Times New Roman" panose="02020603050405020304" pitchFamily="18" charset="0"/>
+                <a:hlinkClick r:id="rId2"/>
+              </a:rPr>
+              <a:t>Schneider_Electric</a:t>
+            </a:r>
+            <a:r>
+              <a:rPr lang="en-US" sz="1800" kern="100" dirty="0">
+                <a:effectLst/>
+                <a:latin typeface="Times New Roman" panose="02020603050405020304" pitchFamily="18" charset="0"/>
+                <a:ea typeface="Aptos" panose="020B0004020202020204" pitchFamily="34" charset="0"/>
+                <a:cs typeface="Times New Roman" panose="02020603050405020304" pitchFamily="18" charset="0"/>
+              </a:rPr>
+              <a:t>”</a:t>
+            </a:r>
+            <a:br>
+              <a:rPr lang="en-US" sz="1800" kern="100" dirty="0">
+                <a:effectLst/>
+                <a:latin typeface="Times New Roman" panose="02020603050405020304" pitchFamily="18" charset="0"/>
+                <a:ea typeface="Aptos" panose="020B0004020202020204" pitchFamily="34" charset="0"/>
+                <a:cs typeface="Times New Roman" panose="02020603050405020304" pitchFamily="18" charset="0"/>
+              </a:rPr>
+            </a:br>
+            <a:r>
+              <a:rPr lang="en-US" sz="1800" b="1" kern="100" dirty="0">
+                <a:effectLst/>
+                <a:latin typeface="Times New Roman" panose="02020603050405020304" pitchFamily="18" charset="0"/>
+                <a:ea typeface="Aptos" panose="020B0004020202020204" pitchFamily="34" charset="0"/>
+                <a:cs typeface="Times New Roman" panose="02020603050405020304" pitchFamily="18" charset="0"/>
+              </a:rPr>
+              <a:t>Sentence</a:t>
+            </a:r>
+            <a:r>
+              <a:rPr lang="en-US" sz="1800" kern="100" dirty="0">
+                <a:effectLst/>
+                <a:latin typeface="Times New Roman" panose="02020603050405020304" pitchFamily="18" charset="0"/>
+                <a:ea typeface="Aptos" panose="020B0004020202020204" pitchFamily="34" charset="0"/>
+                <a:cs typeface="Times New Roman" panose="02020603050405020304" pitchFamily="18" charset="0"/>
+              </a:rPr>
+              <a:t>: “…Parliament Square in London Thomson Reuters By David Lawder and Howard Schneider Advertisement WASHINGTON (Reuters)"</a:t>
+            </a:r>
+            <a:endParaRPr lang="en-CY" sz="1800" kern="100" dirty="0">
+              <a:effectLst/>
+              <a:latin typeface="Aptos" panose="020B0004020202020204" pitchFamily="34" charset="0"/>
+              <a:ea typeface="Aptos" panose="020B0004020202020204" pitchFamily="34" charset="0"/>
+              <a:cs typeface="Times New Roman" panose="02020603050405020304" pitchFamily="18" charset="0"/>
+            </a:endParaRPr>
+          </a:p>
+          <a:p>
+            <a:pPr>
+              <a:lnSpc>
+                <a:spcPct val="115000"/>
+              </a:lnSpc>
+              <a:spcAft>
+                <a:spcPts val="800"/>
+              </a:spcAft>
+              <a:buNone/>
+            </a:pPr>
+            <a:r>
+              <a:rPr lang="en-US" sz="1800" b="1" i="1" kern="100" dirty="0">
+                <a:effectLst/>
+                <a:latin typeface="Times New Roman" panose="02020603050405020304" pitchFamily="18" charset="0"/>
+                <a:ea typeface="Aptos" panose="020B0004020202020204" pitchFamily="34" charset="0"/>
+                <a:cs typeface="Times New Roman" panose="02020603050405020304" pitchFamily="18" charset="0"/>
+              </a:rPr>
+              <a:t>Problem</a:t>
+            </a:r>
+            <a:r>
+              <a:rPr lang="en-US" sz="1800" i="1" kern="100" dirty="0">
+                <a:effectLst/>
+                <a:latin typeface="Times New Roman" panose="02020603050405020304" pitchFamily="18" charset="0"/>
+                <a:ea typeface="Aptos" panose="020B0004020202020204" pitchFamily="34" charset="0"/>
+                <a:cs typeface="Times New Roman" panose="02020603050405020304" pitchFamily="18" charset="0"/>
+              </a:rPr>
+              <a:t>: Assigns Howard -&gt; Schneider when Howard Schneider is the full name of the person</a:t>
+            </a:r>
+            <a:endParaRPr lang="en-CY" sz="1800" kern="100" dirty="0">
+              <a:effectLst/>
+              <a:latin typeface="Aptos" panose="020B0004020202020204" pitchFamily="34" charset="0"/>
+              <a:ea typeface="Aptos" panose="020B0004020202020204" pitchFamily="34" charset="0"/>
+              <a:cs typeface="Times New Roman" panose="02020603050405020304" pitchFamily="18" charset="0"/>
+            </a:endParaRPr>
+          </a:p>
+          <a:p>
+            <a:pPr>
+              <a:buNone/>
+            </a:pPr>
+            <a:r>
+              <a:rPr lang="en-US" sz="1800" b="1" dirty="0">
+                <a:effectLst/>
+                <a:latin typeface="Times New Roman" panose="02020603050405020304" pitchFamily="18" charset="0"/>
+                <a:ea typeface="Aptos" panose="020B0004020202020204" pitchFamily="34" charset="0"/>
+              </a:rPr>
+              <a:t>Dependency Parsing Error</a:t>
+            </a:r>
+            <a:r>
+              <a:rPr lang="en-US" sz="1800" dirty="0">
+                <a:effectLst/>
+                <a:latin typeface="Times New Roman" panose="02020603050405020304" pitchFamily="18" charset="0"/>
+                <a:ea typeface="Aptos" panose="020B0004020202020204" pitchFamily="34" charset="0"/>
+              </a:rPr>
+              <a:t>: Incorrectly splits the Entity “Howard Schneider” into 2 subparts “Howard” and “Schneider” and assigns different </a:t>
+            </a:r>
+            <a:r>
+              <a:rPr lang="en-US" sz="1800" dirty="0" err="1">
+                <a:effectLst/>
+                <a:latin typeface="Times New Roman" panose="02020603050405020304" pitchFamily="18" charset="0"/>
+                <a:ea typeface="Aptos" panose="020B0004020202020204" pitchFamily="34" charset="0"/>
+              </a:rPr>
+              <a:t>dbpedia</a:t>
+            </a:r>
+            <a:r>
+              <a:rPr lang="en-US" sz="1800" dirty="0">
+                <a:effectLst/>
+                <a:latin typeface="Times New Roman" panose="02020603050405020304" pitchFamily="18" charset="0"/>
+                <a:ea typeface="Aptos" panose="020B0004020202020204" pitchFamily="34" charset="0"/>
+              </a:rPr>
+              <a:t> links to them (“John_Howard” and “</a:t>
+            </a:r>
+            <a:r>
+              <a:rPr lang="en-US" sz="1800" dirty="0" err="1">
+                <a:effectLst/>
+                <a:latin typeface="Times New Roman" panose="02020603050405020304" pitchFamily="18" charset="0"/>
+                <a:ea typeface="Aptos" panose="020B0004020202020204" pitchFamily="34" charset="0"/>
+              </a:rPr>
+              <a:t>Schneider_Electric</a:t>
+            </a:r>
+            <a:r>
+              <a:rPr lang="en-US" sz="1800" dirty="0">
+                <a:effectLst/>
+                <a:latin typeface="Times New Roman" panose="02020603050405020304" pitchFamily="18" charset="0"/>
+                <a:ea typeface="Aptos" panose="020B0004020202020204" pitchFamily="34" charset="0"/>
+              </a:rPr>
+              <a:t>”).</a:t>
+            </a:r>
+          </a:p>
+          <a:p>
+            <a:pPr>
+              <a:buNone/>
+            </a:pPr>
+            <a:r>
+              <a:rPr lang="en-US" sz="1800" b="1" dirty="0">
+                <a:effectLst/>
+                <a:latin typeface="Times New Roman" panose="02020603050405020304" pitchFamily="18" charset="0"/>
+                <a:ea typeface="Aptos" panose="020B0004020202020204" pitchFamily="34" charset="0"/>
+              </a:rPr>
+              <a:t>Dictionary Error</a:t>
+            </a:r>
+            <a:r>
+              <a:rPr lang="en-US" sz="1800" dirty="0">
+                <a:effectLst/>
+                <a:latin typeface="Times New Roman" panose="02020603050405020304" pitchFamily="18" charset="0"/>
+                <a:ea typeface="Aptos" panose="020B0004020202020204" pitchFamily="34" charset="0"/>
+              </a:rPr>
+              <a:t>: Does not correctly link the Entity “Howard Schneider” to a pre-existing </a:t>
+            </a:r>
+            <a:r>
+              <a:rPr lang="en-US" sz="1800" dirty="0" err="1">
+                <a:effectLst/>
+                <a:latin typeface="Times New Roman" panose="02020603050405020304" pitchFamily="18" charset="0"/>
+                <a:ea typeface="Aptos" panose="020B0004020202020204" pitchFamily="34" charset="0"/>
+              </a:rPr>
+              <a:t>dbpedia</a:t>
+            </a:r>
+            <a:r>
+              <a:rPr lang="en-US" sz="1800" dirty="0">
+                <a:effectLst/>
+                <a:latin typeface="Times New Roman" panose="02020603050405020304" pitchFamily="18" charset="0"/>
+                <a:ea typeface="Aptos" panose="020B0004020202020204" pitchFamily="34" charset="0"/>
+              </a:rPr>
+              <a:t> link, as it does not exist.</a:t>
+            </a:r>
+            <a:endParaRPr lang="en-US" dirty="0"/>
           </a:p>
         </p:txBody>
       </p:sp>
